--- a/public/slides/aa203/lecture_11.pptx
+++ b/public/slides/aa203/lecture_11.pptx
@@ -177,7 +177,7 @@
 <file path=ppt/revisionInfo.xml><?xml version="1.0" encoding="utf-8"?>
 <p1510:revInfo xmlns:a="http://schemas.openxmlformats.org/drawingml/2006/main" xmlns:r="http://schemas.openxmlformats.org/officeDocument/2006/relationships" xmlns:p1510="http://schemas.microsoft.com/office/powerpoint/2015/10/main">
   <p1510:revLst>
-    <p1510:client id="{AC883C66-D37B-4423-AD2F-29CB2587B92B}" v="230" dt="2022-05-11T07:30:50.663"/>
+    <p1510:client id="{3DC49001-F4DF-DF42-A8E5-D93C6B15AE33}" v="2" dt="2026-08-13T21:18:10.863"/>
   </p1510:revLst>
 </p1510:revInfo>
 </file>
@@ -185,191 +185,25 @@
 <file path=ppt/changesInfos/changesInfo1.xml><?xml version="1.0" encoding="utf-8"?>
 <pc:chgInfo xmlns:a="http://schemas.openxmlformats.org/drawingml/2006/main" xmlns:r="http://schemas.openxmlformats.org/officeDocument/2006/relationships" xmlns:ac="http://schemas.microsoft.com/office/drawing/2013/main/command" xmlns:pc="http://schemas.microsoft.com/office/powerpoint/2013/main/command">
   <pc:docChgLst>
-    <pc:chgData name="Edward Fu Schmerling" userId="c8b75dde-c097-4599-bb13-81e931e3f9a3" providerId="ADAL" clId="{AC883C66-D37B-4423-AD2F-29CB2587B92B}"/>
-    <pc:docChg chg="undo custSel addSld delSld modSld sldOrd modSection">
-      <pc:chgData name="Edward Fu Schmerling" userId="c8b75dde-c097-4599-bb13-81e931e3f9a3" providerId="ADAL" clId="{AC883C66-D37B-4423-AD2F-29CB2587B92B}" dt="2022-05-11T07:30:42.070" v="413" actId="255"/>
+    <pc:chgData name="Daniele Gammelli" userId="292b8a31-f1ba-4b4c-b196-a231dc095d13" providerId="ADAL" clId="{6E670754-AB6A-5789-AA0A-6F6FD9CE3EEA}"/>
+    <pc:docChg chg="modSld">
+      <pc:chgData name="Daniele Gammelli" userId="292b8a31-f1ba-4b4c-b196-a231dc095d13" providerId="ADAL" clId="{6E670754-AB6A-5789-AA0A-6F6FD9CE3EEA}" dt="2026-08-13T21:17:58.418" v="1" actId="20577"/>
       <pc:docMkLst>
         <pc:docMk/>
       </pc:docMkLst>
-      <pc:sldChg chg="modSp mod">
-        <pc:chgData name="Edward Fu Schmerling" userId="c8b75dde-c097-4599-bb13-81e931e3f9a3" providerId="ADAL" clId="{AC883C66-D37B-4423-AD2F-29CB2587B92B}" dt="2022-05-09T05:37:19.342" v="163" actId="1076"/>
-        <pc:sldMkLst>
-          <pc:docMk/>
-          <pc:sldMk cId="3651528683" sldId="399"/>
-        </pc:sldMkLst>
-        <pc:spChg chg="mod">
-          <ac:chgData name="Edward Fu Schmerling" userId="c8b75dde-c097-4599-bb13-81e931e3f9a3" providerId="ADAL" clId="{AC883C66-D37B-4423-AD2F-29CB2587B92B}" dt="2022-05-09T05:37:19.342" v="163" actId="1076"/>
-          <ac:spMkLst>
-            <pc:docMk/>
-            <pc:sldMk cId="3651528683" sldId="399"/>
-            <ac:spMk id="3" creationId="{041834AB-4990-1841-A099-C9C9563E417D}"/>
-          </ac:spMkLst>
-        </pc:spChg>
-      </pc:sldChg>
-      <pc:sldChg chg="modAnim">
-        <pc:chgData name="Edward Fu Schmerling" userId="c8b75dde-c097-4599-bb13-81e931e3f9a3" providerId="ADAL" clId="{AC883C66-D37B-4423-AD2F-29CB2587B92B}" dt="2022-05-09T04:21:13.695" v="19"/>
+      <pc:sldChg chg="modNotesTx">
+        <pc:chgData name="Daniele Gammelli" userId="292b8a31-f1ba-4b4c-b196-a231dc095d13" providerId="ADAL" clId="{6E670754-AB6A-5789-AA0A-6F6FD9CE3EEA}" dt="2026-08-13T21:17:58.418" v="1" actId="20577"/>
         <pc:sldMkLst>
           <pc:docMk/>
           <pc:sldMk cId="1305302879" sldId="523"/>
         </pc:sldMkLst>
       </pc:sldChg>
-      <pc:sldChg chg="modSp mod">
-        <pc:chgData name="Edward Fu Schmerling" userId="c8b75dde-c097-4599-bb13-81e931e3f9a3" providerId="ADAL" clId="{AC883C66-D37B-4423-AD2F-29CB2587B92B}" dt="2022-05-09T04:25:37.767" v="24" actId="20577"/>
-        <pc:sldMkLst>
-          <pc:docMk/>
-          <pc:sldMk cId="257311969" sldId="525"/>
-        </pc:sldMkLst>
-        <pc:spChg chg="mod">
-          <ac:chgData name="Edward Fu Schmerling" userId="c8b75dde-c097-4599-bb13-81e931e3f9a3" providerId="ADAL" clId="{AC883C66-D37B-4423-AD2F-29CB2587B92B}" dt="2022-05-09T04:25:37.767" v="24" actId="20577"/>
-          <ac:spMkLst>
-            <pc:docMk/>
-            <pc:sldMk cId="257311969" sldId="525"/>
-            <ac:spMk id="3" creationId="{0035C820-8224-1545-9D71-04DFFB6377A9}"/>
-          </ac:spMkLst>
-        </pc:spChg>
-      </pc:sldChg>
-      <pc:sldChg chg="modSp">
-        <pc:chgData name="Edward Fu Schmerling" userId="c8b75dde-c097-4599-bb13-81e931e3f9a3" providerId="ADAL" clId="{AC883C66-D37B-4423-AD2F-29CB2587B92B}" dt="2022-05-09T04:55:54.998" v="86" actId="20577"/>
-        <pc:sldMkLst>
-          <pc:docMk/>
-          <pc:sldMk cId="1223094151" sldId="531"/>
-        </pc:sldMkLst>
-        <pc:spChg chg="mod">
-          <ac:chgData name="Edward Fu Schmerling" userId="c8b75dde-c097-4599-bb13-81e931e3f9a3" providerId="ADAL" clId="{AC883C66-D37B-4423-AD2F-29CB2587B92B}" dt="2022-05-09T04:55:54.998" v="86" actId="20577"/>
-          <ac:spMkLst>
-            <pc:docMk/>
-            <pc:sldMk cId="1223094151" sldId="531"/>
-            <ac:spMk id="3" creationId="{1AFF7F1A-8133-1C47-97FD-A6C5DF125B29}"/>
-          </ac:spMkLst>
-        </pc:spChg>
-      </pc:sldChg>
-      <pc:sldChg chg="modSp mod">
-        <pc:chgData name="Edward Fu Schmerling" userId="c8b75dde-c097-4599-bb13-81e931e3f9a3" providerId="ADAL" clId="{AC883C66-D37B-4423-AD2F-29CB2587B92B}" dt="2022-05-11T07:26:03.802" v="254" actId="27636"/>
-        <pc:sldMkLst>
-          <pc:docMk/>
-          <pc:sldMk cId="455590951" sldId="537"/>
-        </pc:sldMkLst>
-        <pc:spChg chg="mod">
-          <ac:chgData name="Edward Fu Schmerling" userId="c8b75dde-c097-4599-bb13-81e931e3f9a3" providerId="ADAL" clId="{AC883C66-D37B-4423-AD2F-29CB2587B92B}" dt="2022-05-11T07:26:03.802" v="254" actId="27636"/>
-          <ac:spMkLst>
-            <pc:docMk/>
-            <pc:sldMk cId="455590951" sldId="537"/>
-            <ac:spMk id="3" creationId="{ACB573D9-E010-824A-A24B-BF01E93F3BFA}"/>
-          </ac:spMkLst>
-        </pc:spChg>
-      </pc:sldChg>
-      <pc:sldChg chg="modSp mod">
-        <pc:chgData name="Edward Fu Schmerling" userId="c8b75dde-c097-4599-bb13-81e931e3f9a3" providerId="ADAL" clId="{AC883C66-D37B-4423-AD2F-29CB2587B92B}" dt="2022-05-11T07:30:42.070" v="413" actId="255"/>
-        <pc:sldMkLst>
-          <pc:docMk/>
-          <pc:sldMk cId="2831023873" sldId="538"/>
-        </pc:sldMkLst>
-        <pc:spChg chg="mod">
-          <ac:chgData name="Edward Fu Schmerling" userId="c8b75dde-c097-4599-bb13-81e931e3f9a3" providerId="ADAL" clId="{AC883C66-D37B-4423-AD2F-29CB2587B92B}" dt="2022-05-11T07:30:42.070" v="413" actId="255"/>
-          <ac:spMkLst>
-            <pc:docMk/>
-            <pc:sldMk cId="2831023873" sldId="538"/>
-            <ac:spMk id="3" creationId="{30A2B76E-2751-AF44-9A06-46160FE4ECD7}"/>
-          </ac:spMkLst>
-        </pc:spChg>
-      </pc:sldChg>
-      <pc:sldChg chg="modSp mod">
-        <pc:chgData name="Edward Fu Schmerling" userId="c8b75dde-c097-4599-bb13-81e931e3f9a3" providerId="ADAL" clId="{AC883C66-D37B-4423-AD2F-29CB2587B92B}" dt="2022-05-09T05:36:45.396" v="110" actId="14100"/>
-        <pc:sldMkLst>
-          <pc:docMk/>
-          <pc:sldMk cId="2127953754" sldId="546"/>
-        </pc:sldMkLst>
-        <pc:spChg chg="mod">
-          <ac:chgData name="Edward Fu Schmerling" userId="c8b75dde-c097-4599-bb13-81e931e3f9a3" providerId="ADAL" clId="{AC883C66-D37B-4423-AD2F-29CB2587B92B}" dt="2022-05-09T05:36:45.396" v="110" actId="14100"/>
-          <ac:spMkLst>
-            <pc:docMk/>
-            <pc:sldMk cId="2127953754" sldId="546"/>
-            <ac:spMk id="3" creationId="{1ABC5208-0E32-D14B-985F-81A6036FA146}"/>
-          </ac:spMkLst>
-        </pc:spChg>
-      </pc:sldChg>
-      <pc:sldChg chg="modSp mod">
-        <pc:chgData name="Edward Fu Schmerling" userId="c8b75dde-c097-4599-bb13-81e931e3f9a3" providerId="ADAL" clId="{AC883C66-D37B-4423-AD2F-29CB2587B92B}" dt="2022-05-09T04:19:50.766" v="14" actId="20577"/>
-        <pc:sldMkLst>
-          <pc:docMk/>
-          <pc:sldMk cId="3822192160" sldId="549"/>
-        </pc:sldMkLst>
-        <pc:spChg chg="mod">
-          <ac:chgData name="Edward Fu Schmerling" userId="c8b75dde-c097-4599-bb13-81e931e3f9a3" providerId="ADAL" clId="{AC883C66-D37B-4423-AD2F-29CB2587B92B}" dt="2022-05-09T04:19:50.766" v="14" actId="20577"/>
-          <ac:spMkLst>
-            <pc:docMk/>
-            <pc:sldMk cId="3822192160" sldId="549"/>
-            <ac:spMk id="3" creationId="{DBE9D934-213B-9747-B17D-1A05FA70D288}"/>
-          </ac:spMkLst>
-        </pc:spChg>
-      </pc:sldChg>
-      <pc:sldChg chg="delSp add mod ord delAnim">
-        <pc:chgData name="Edward Fu Schmerling" userId="c8b75dde-c097-4599-bb13-81e931e3f9a3" providerId="ADAL" clId="{AC883C66-D37B-4423-AD2F-29CB2587B92B}" dt="2022-05-09T04:21:07.031" v="18"/>
+      <pc:sldChg chg="modNotesTx">
+        <pc:chgData name="Daniele Gammelli" userId="292b8a31-f1ba-4b4c-b196-a231dc095d13" providerId="ADAL" clId="{6E670754-AB6A-5789-AA0A-6F6FD9CE3EEA}" dt="2026-08-13T21:17:55.896" v="0" actId="20577"/>
         <pc:sldMkLst>
           <pc:docMk/>
           <pc:sldMk cId="537112962" sldId="550"/>
         </pc:sldMkLst>
-        <pc:grpChg chg="del">
-          <ac:chgData name="Edward Fu Schmerling" userId="c8b75dde-c097-4599-bb13-81e931e3f9a3" providerId="ADAL" clId="{AC883C66-D37B-4423-AD2F-29CB2587B92B}" dt="2022-05-09T04:21:02.282" v="16" actId="478"/>
-          <ac:grpSpMkLst>
-            <pc:docMk/>
-            <pc:sldMk cId="537112962" sldId="550"/>
-            <ac:grpSpMk id="8" creationId="{ED761CDC-11FE-A540-B11F-E4E6D369E816}"/>
-          </ac:grpSpMkLst>
-        </pc:grpChg>
-      </pc:sldChg>
-      <pc:sldChg chg="add del">
-        <pc:chgData name="Edward Fu Schmerling" userId="c8b75dde-c097-4599-bb13-81e931e3f9a3" providerId="ADAL" clId="{AC883C66-D37B-4423-AD2F-29CB2587B92B}" dt="2022-05-09T04:29:10.205" v="26"/>
-        <pc:sldMkLst>
-          <pc:docMk/>
-          <pc:sldMk cId="905022008" sldId="551"/>
-        </pc:sldMkLst>
-      </pc:sldChg>
-      <pc:sldChg chg="addSp modSp add mod">
-        <pc:chgData name="Edward Fu Schmerling" userId="c8b75dde-c097-4599-bb13-81e931e3f9a3" providerId="ADAL" clId="{AC883C66-D37B-4423-AD2F-29CB2587B92B}" dt="2022-05-09T04:30:22.258" v="71" actId="14100"/>
-        <pc:sldMkLst>
-          <pc:docMk/>
-          <pc:sldMk cId="2635338328" sldId="551"/>
-        </pc:sldMkLst>
-        <pc:spChg chg="add mod">
-          <ac:chgData name="Edward Fu Schmerling" userId="c8b75dde-c097-4599-bb13-81e931e3f9a3" providerId="ADAL" clId="{AC883C66-D37B-4423-AD2F-29CB2587B92B}" dt="2022-05-09T04:29:35.844" v="35" actId="1582"/>
-          <ac:spMkLst>
-            <pc:docMk/>
-            <pc:sldMk cId="2635338328" sldId="551"/>
-            <ac:spMk id="11" creationId="{86304092-6EED-4E90-B1CA-D905F61134AA}"/>
-          </ac:spMkLst>
-        </pc:spChg>
-        <pc:spChg chg="add mod">
-          <ac:chgData name="Edward Fu Schmerling" userId="c8b75dde-c097-4599-bb13-81e931e3f9a3" providerId="ADAL" clId="{AC883C66-D37B-4423-AD2F-29CB2587B92B}" dt="2022-05-09T04:29:41.802" v="38" actId="14100"/>
-          <ac:spMkLst>
-            <pc:docMk/>
-            <pc:sldMk cId="2635338328" sldId="551"/>
-            <ac:spMk id="12" creationId="{B290592A-0625-4D49-A6F6-9375865459A4}"/>
-          </ac:spMkLst>
-        </pc:spChg>
-        <pc:spChg chg="add mod">
-          <ac:chgData name="Edward Fu Schmerling" userId="c8b75dde-c097-4599-bb13-81e931e3f9a3" providerId="ADAL" clId="{AC883C66-D37B-4423-AD2F-29CB2587B92B}" dt="2022-05-09T04:30:22.258" v="71" actId="14100"/>
-          <ac:spMkLst>
-            <pc:docMk/>
-            <pc:sldMk cId="2635338328" sldId="551"/>
-            <ac:spMk id="13" creationId="{CE7A15D4-CB75-4402-9A49-81CA256B9AC3}"/>
-          </ac:spMkLst>
-        </pc:spChg>
-      </pc:sldChg>
-      <pc:sldChg chg="modSp add del">
-        <pc:chgData name="Edward Fu Schmerling" userId="c8b75dde-c097-4599-bb13-81e931e3f9a3" providerId="ADAL" clId="{AC883C66-D37B-4423-AD2F-29CB2587B92B}" dt="2022-05-09T04:57:48.789" v="103" actId="47"/>
-        <pc:sldMkLst>
-          <pc:docMk/>
-          <pc:sldMk cId="3150164228" sldId="552"/>
-        </pc:sldMkLst>
-        <pc:spChg chg="mod">
-          <ac:chgData name="Edward Fu Schmerling" userId="c8b75dde-c097-4599-bb13-81e931e3f9a3" providerId="ADAL" clId="{AC883C66-D37B-4423-AD2F-29CB2587B92B}" dt="2022-05-09T04:57:33.719" v="102" actId="20577"/>
-          <ac:spMkLst>
-            <pc:docMk/>
-            <pc:sldMk cId="3150164228" sldId="552"/>
-            <ac:spMk id="7" creationId="{517A27D2-3657-394C-A2D3-D02A4011D262}"/>
-          </ac:spMkLst>
-        </pc:spChg>
       </pc:sldChg>
     </pc:docChg>
   </pc:docChgLst>
@@ -458,7 +292,7 @@
           <a:p>
             <a:fld id="{EBD6F028-2067-3740-AA48-A91E93570B1D}" type="datetimeFigureOut">
               <a:rPr lang="en-US" smtClean="0"/>
-              <a:t>5/4/26</a:t>
+              <a:t>8/13/26</a:t>
             </a:fld>
             <a:endParaRPr lang="en-US"/>
           </a:p>
@@ -853,153 +687,6 @@
           <a:bodyPr/>
           <a:lstStyle/>
           <a:p>
-            <a:pPr marL="171450" marR="0" lvl="0" indent="-171450" algn="l" defTabSz="914400" rtl="0" eaLnBrk="1" fontAlgn="auto" latinLnBrk="0" hangingPunct="1">
-              <a:lnSpc>
-                <a:spcPct val="100000"/>
-              </a:lnSpc>
-              <a:spcBef>
-                <a:spcPts val="0"/>
-              </a:spcBef>
-              <a:spcAft>
-                <a:spcPts val="0"/>
-              </a:spcAft>
-              <a:buClrTx/>
-              <a:buSzTx/>
-              <a:buFont typeface="Arial" panose="020B0604020202020204" pitchFamily="34" charset="0"/>
-              <a:buChar char="•"/>
-              <a:tabLst/>
-              <a:defRPr/>
-            </a:pPr>
-            <a:r>
-              <a:rPr lang="en-US" sz="1200" kern="1200" dirty="0">
-                <a:solidFill>
-                  <a:schemeClr val="tx1"/>
-                </a:solidFill>
-                <a:effectLst/>
-                <a:latin typeface="+mn-lt"/>
-                <a:ea typeface="+mn-ea"/>
-                <a:cs typeface="+mn-cs"/>
-              </a:rPr>
-              <a:t>An infinite horizon “sub- optimal” controller can be designed by repeatedly solving finite time optimal control problems in a receding horizon fashion as described next. </a:t>
-            </a:r>
-            <a:endParaRPr lang="en-US" dirty="0"/>
-          </a:p>
-          <a:p>
-            <a:pPr marL="171450" marR="0" lvl="0" indent="-171450" algn="l" defTabSz="914400" rtl="0" eaLnBrk="1" fontAlgn="auto" latinLnBrk="0" hangingPunct="1">
-              <a:lnSpc>
-                <a:spcPct val="100000"/>
-              </a:lnSpc>
-              <a:spcBef>
-                <a:spcPts val="0"/>
-              </a:spcBef>
-              <a:spcAft>
-                <a:spcPts val="0"/>
-              </a:spcAft>
-              <a:buClrTx/>
-              <a:buSzTx/>
-              <a:buFont typeface="Arial" panose="020B0604020202020204" pitchFamily="34" charset="0"/>
-              <a:buChar char="•"/>
-              <a:tabLst/>
-              <a:defRPr/>
-            </a:pPr>
-            <a:r>
-              <a:rPr lang="en-US" sz="1200" kern="1200" dirty="0">
-                <a:solidFill>
-                  <a:schemeClr val="tx1"/>
-                </a:solidFill>
-                <a:effectLst/>
-                <a:latin typeface="+mn-lt"/>
-                <a:ea typeface="+mn-ea"/>
-                <a:cs typeface="+mn-cs"/>
-              </a:rPr>
-              <a:t>At each sampling time, starting at the current state, an open-loop optimal control problem is solved over a finite horizon </a:t>
-            </a:r>
-            <a:endParaRPr lang="en-US" dirty="0"/>
-          </a:p>
-          <a:p>
-            <a:pPr marL="171450" marR="0" lvl="0" indent="-171450" algn="l" defTabSz="914400" rtl="0" eaLnBrk="1" fontAlgn="auto" latinLnBrk="0" hangingPunct="1">
-              <a:lnSpc>
-                <a:spcPct val="100000"/>
-              </a:lnSpc>
-              <a:spcBef>
-                <a:spcPts val="0"/>
-              </a:spcBef>
-              <a:spcAft>
-                <a:spcPts val="0"/>
-              </a:spcAft>
-              <a:buClrTx/>
-              <a:buSzTx/>
-              <a:buFont typeface="Arial" panose="020B0604020202020204" pitchFamily="34" charset="0"/>
-              <a:buChar char="•"/>
-              <a:tabLst/>
-              <a:defRPr/>
-            </a:pPr>
-            <a:r>
-              <a:rPr lang="en-US" sz="1200" kern="1200" dirty="0">
-                <a:solidFill>
-                  <a:schemeClr val="tx1"/>
-                </a:solidFill>
-                <a:effectLst/>
-                <a:latin typeface="+mn-lt"/>
-                <a:ea typeface="+mn-ea"/>
-                <a:cs typeface="+mn-cs"/>
-              </a:rPr>
-              <a:t>The computed optimal manipulated input signal is applied to the process only during the following sampling interval [t, t + 1]. </a:t>
-            </a:r>
-            <a:endParaRPr lang="en-US" dirty="0"/>
-          </a:p>
-          <a:p>
-            <a:pPr marL="171450" marR="0" lvl="0" indent="-171450" algn="l" defTabSz="914400" rtl="0" eaLnBrk="1" fontAlgn="auto" latinLnBrk="0" hangingPunct="1">
-              <a:lnSpc>
-                <a:spcPct val="100000"/>
-              </a:lnSpc>
-              <a:spcBef>
-                <a:spcPts val="0"/>
-              </a:spcBef>
-              <a:spcAft>
-                <a:spcPts val="0"/>
-              </a:spcAft>
-              <a:buClrTx/>
-              <a:buSzTx/>
-              <a:buFont typeface="Arial" panose="020B0604020202020204" pitchFamily="34" charset="0"/>
-              <a:buChar char="•"/>
-              <a:tabLst/>
-              <a:defRPr/>
-            </a:pPr>
-            <a:r>
-              <a:rPr lang="en-US" sz="1200" kern="1200" dirty="0">
-                <a:solidFill>
-                  <a:schemeClr val="tx1"/>
-                </a:solidFill>
-                <a:effectLst/>
-                <a:latin typeface="+mn-lt"/>
-                <a:ea typeface="+mn-ea"/>
-                <a:cs typeface="+mn-cs"/>
-              </a:rPr>
-              <a:t>At the next time step t + 1 a new optimal control problem based on new measurements of the state is solved over a shifted horizon</a:t>
-            </a:r>
-          </a:p>
-          <a:p>
-            <a:pPr marL="171450" marR="0" lvl="0" indent="-171450" algn="l" defTabSz="914400" rtl="0" eaLnBrk="1" fontAlgn="auto" latinLnBrk="0" hangingPunct="1">
-              <a:lnSpc>
-                <a:spcPct val="100000"/>
-              </a:lnSpc>
-              <a:spcBef>
-                <a:spcPts val="0"/>
-              </a:spcBef>
-              <a:spcAft>
-                <a:spcPts val="0"/>
-              </a:spcAft>
-              <a:buClrTx/>
-              <a:buSzTx/>
-              <a:buFont typeface="Arial" panose="020B0604020202020204" pitchFamily="34" charset="0"/>
-              <a:buChar char="•"/>
-              <a:tabLst/>
-              <a:defRPr/>
-            </a:pPr>
-            <a:endParaRPr lang="en-US" dirty="0"/>
-          </a:p>
-          <a:p>
             <a:pPr marL="171450" indent="-171450">
               <a:buFont typeface="Arial" panose="020B0604020202020204" pitchFamily="34" charset="0"/>
               <a:buChar char="•"/>
@@ -1087,189 +774,6 @@
         <p:txBody>
           <a:bodyPr/>
           <a:lstStyle/>
-          <a:p>
-            <a:pPr marL="171450" marR="0" lvl="0" indent="-171450" algn="l" defTabSz="914400" rtl="0" eaLnBrk="1" fontAlgn="auto" latinLnBrk="0" hangingPunct="1">
-              <a:lnSpc>
-                <a:spcPct val="100000"/>
-              </a:lnSpc>
-              <a:spcBef>
-                <a:spcPts val="0"/>
-              </a:spcBef>
-              <a:spcAft>
-                <a:spcPts val="0"/>
-              </a:spcAft>
-              <a:buClrTx/>
-              <a:buSzTx/>
-              <a:buFont typeface="Arial" panose="020B0604020202020204" pitchFamily="34" charset="0"/>
-              <a:buChar char="•"/>
-              <a:tabLst/>
-              <a:defRPr/>
-            </a:pPr>
-            <a:r>
-              <a:rPr lang="en-US" sz="1200" kern="1200" dirty="0">
-                <a:solidFill>
-                  <a:schemeClr val="tx1"/>
-                </a:solidFill>
-                <a:effectLst/>
-                <a:latin typeface="+mn-lt"/>
-                <a:ea typeface="+mn-ea"/>
-                <a:cs typeface="+mn-cs"/>
-              </a:rPr>
-              <a:t>An infinite horizon “sub- optimal” controller can be designed by repeatedly solving finite time optimal con- </a:t>
-            </a:r>
-            <a:r>
-              <a:rPr lang="en-US" sz="1200" kern="1200" dirty="0" err="1">
-                <a:solidFill>
-                  <a:schemeClr val="tx1"/>
-                </a:solidFill>
-                <a:effectLst/>
-                <a:latin typeface="+mn-lt"/>
-                <a:ea typeface="+mn-ea"/>
-                <a:cs typeface="+mn-cs"/>
-              </a:rPr>
-              <a:t>trol</a:t>
-            </a:r>
-            <a:r>
-              <a:rPr lang="en-US" sz="1200" kern="1200" dirty="0">
-                <a:solidFill>
-                  <a:schemeClr val="tx1"/>
-                </a:solidFill>
-                <a:effectLst/>
-                <a:latin typeface="+mn-lt"/>
-                <a:ea typeface="+mn-ea"/>
-                <a:cs typeface="+mn-cs"/>
-              </a:rPr>
-              <a:t> problems in a receding horizon fashion as described next. </a:t>
-            </a:r>
-            <a:endParaRPr lang="en-US" dirty="0"/>
-          </a:p>
-          <a:p>
-            <a:pPr marL="171450" marR="0" lvl="0" indent="-171450" algn="l" defTabSz="914400" rtl="0" eaLnBrk="1" fontAlgn="auto" latinLnBrk="0" hangingPunct="1">
-              <a:lnSpc>
-                <a:spcPct val="100000"/>
-              </a:lnSpc>
-              <a:spcBef>
-                <a:spcPts val="0"/>
-              </a:spcBef>
-              <a:spcAft>
-                <a:spcPts val="0"/>
-              </a:spcAft>
-              <a:buClrTx/>
-              <a:buSzTx/>
-              <a:buFont typeface="Arial" panose="020B0604020202020204" pitchFamily="34" charset="0"/>
-              <a:buChar char="•"/>
-              <a:tabLst/>
-              <a:defRPr/>
-            </a:pPr>
-            <a:r>
-              <a:rPr lang="en-US" sz="1200" kern="1200" dirty="0">
-                <a:solidFill>
-                  <a:schemeClr val="tx1"/>
-                </a:solidFill>
-                <a:effectLst/>
-                <a:latin typeface="+mn-lt"/>
-                <a:ea typeface="+mn-ea"/>
-                <a:cs typeface="+mn-cs"/>
-              </a:rPr>
-              <a:t>At each sampling time, starting at the current state, an open-loop optimal control problem is solved over a finite horizon </a:t>
-            </a:r>
-            <a:endParaRPr lang="en-US" dirty="0"/>
-          </a:p>
-          <a:p>
-            <a:pPr marL="171450" marR="0" lvl="0" indent="-171450" algn="l" defTabSz="914400" rtl="0" eaLnBrk="1" fontAlgn="auto" latinLnBrk="0" hangingPunct="1">
-              <a:lnSpc>
-                <a:spcPct val="100000"/>
-              </a:lnSpc>
-              <a:spcBef>
-                <a:spcPts val="0"/>
-              </a:spcBef>
-              <a:spcAft>
-                <a:spcPts val="0"/>
-              </a:spcAft>
-              <a:buClrTx/>
-              <a:buSzTx/>
-              <a:buFont typeface="Arial" panose="020B0604020202020204" pitchFamily="34" charset="0"/>
-              <a:buChar char="•"/>
-              <a:tabLst/>
-              <a:defRPr/>
-            </a:pPr>
-            <a:r>
-              <a:rPr lang="en-US" sz="1200" kern="1200" dirty="0">
-                <a:solidFill>
-                  <a:schemeClr val="tx1"/>
-                </a:solidFill>
-                <a:effectLst/>
-                <a:latin typeface="+mn-lt"/>
-                <a:ea typeface="+mn-ea"/>
-                <a:cs typeface="+mn-cs"/>
-              </a:rPr>
-              <a:t>The computed optimal manipulated input signal is applied to the process only during the following sampling interval [t, t + 1]. </a:t>
-            </a:r>
-            <a:endParaRPr lang="en-US" dirty="0"/>
-          </a:p>
-          <a:p>
-            <a:pPr marL="171450" marR="0" lvl="0" indent="-171450" algn="l" defTabSz="914400" rtl="0" eaLnBrk="1" fontAlgn="auto" latinLnBrk="0" hangingPunct="1">
-              <a:lnSpc>
-                <a:spcPct val="100000"/>
-              </a:lnSpc>
-              <a:spcBef>
-                <a:spcPts val="0"/>
-              </a:spcBef>
-              <a:spcAft>
-                <a:spcPts val="0"/>
-              </a:spcAft>
-              <a:buClrTx/>
-              <a:buSzTx/>
-              <a:buFont typeface="Arial" panose="020B0604020202020204" pitchFamily="34" charset="0"/>
-              <a:buChar char="•"/>
-              <a:tabLst/>
-              <a:defRPr/>
-            </a:pPr>
-            <a:r>
-              <a:rPr lang="en-US" sz="1200" kern="1200" dirty="0">
-                <a:solidFill>
-                  <a:schemeClr val="tx1"/>
-                </a:solidFill>
-                <a:effectLst/>
-                <a:latin typeface="+mn-lt"/>
-                <a:ea typeface="+mn-ea"/>
-                <a:cs typeface="+mn-cs"/>
-              </a:rPr>
-              <a:t>At the next time step t + 1 a new optimal control problem based on new measurements of the state is solved over a </a:t>
-            </a:r>
-            <a:r>
-              <a:rPr lang="en-US" sz="1200" kern="1200">
-                <a:solidFill>
-                  <a:schemeClr val="tx1"/>
-                </a:solidFill>
-                <a:effectLst/>
-                <a:latin typeface="+mn-lt"/>
-                <a:ea typeface="+mn-ea"/>
-                <a:cs typeface="+mn-cs"/>
-              </a:rPr>
-              <a:t>shifted horizon</a:t>
-            </a:r>
-          </a:p>
-          <a:p>
-            <a:pPr marL="171450" marR="0" lvl="0" indent="-171450" algn="l" defTabSz="914400" rtl="0" eaLnBrk="1" fontAlgn="auto" latinLnBrk="0" hangingPunct="1">
-              <a:lnSpc>
-                <a:spcPct val="100000"/>
-              </a:lnSpc>
-              <a:spcBef>
-                <a:spcPts val="0"/>
-              </a:spcBef>
-              <a:spcAft>
-                <a:spcPts val="0"/>
-              </a:spcAft>
-              <a:buClrTx/>
-              <a:buSzTx/>
-              <a:buFont typeface="Arial" panose="020B0604020202020204" pitchFamily="34" charset="0"/>
-              <a:buChar char="•"/>
-              <a:tabLst/>
-              <a:defRPr/>
-            </a:pPr>
-            <a:endParaRPr lang="en-US"/>
-          </a:p>
           <a:p>
             <a:pPr marL="171450" indent="-171450">
               <a:buFont typeface="Arial" panose="020B0604020202020204" pitchFamily="34" charset="0"/>
@@ -1361,321 +865,7 @@
               <a:bodyPr/>
               <a:lstStyle/>
               <a:p>
-                <a:r>
-                  <a:rPr lang="en-US" dirty="0"/>
-                  <a:t>A set in </a:t>
-                </a:r>
-                <a14:m>
-                  <m:oMath xmlns:m="http://schemas.openxmlformats.org/officeDocument/2006/math">
-                    <m:sSup>
-                      <m:sSupPr>
-                        <m:ctrlPr>
-                          <a:rPr lang="ar-AE" sz="1200" i="1" kern="1200">
-                            <a:solidFill>
-                              <a:schemeClr val="tx1"/>
-                            </a:solidFill>
-                            <a:latin typeface="Cambria Math" panose="02040503050406030204" pitchFamily="18" charset="0"/>
-                            <a:ea typeface="+mn-ea"/>
-                            <a:cs typeface="+mn-cs"/>
-                          </a:rPr>
-                        </m:ctrlPr>
-                      </m:sSupPr>
-                      <m:e>
-                        <m:r>
-                          <a:rPr lang="ar-AE" sz="1200" kern="1200">
-                            <a:solidFill>
-                              <a:schemeClr val="tx1"/>
-                            </a:solidFill>
-                            <a:latin typeface="Cambria Math" panose="02040503050406030204" pitchFamily="18" charset="0"/>
-                            <a:ea typeface="+mn-ea"/>
-                            <a:cs typeface="+mn-cs"/>
-                          </a:rPr>
-                          <m:t>ℝ</m:t>
-                        </m:r>
-                      </m:e>
-                      <m:sup>
-                        <m:r>
-                          <a:rPr lang="ar-AE" sz="1200" i="1" kern="1200">
-                            <a:solidFill>
-                              <a:schemeClr val="tx1"/>
-                            </a:solidFill>
-                            <a:latin typeface="Cambria Math" panose="02040503050406030204" pitchFamily="18" charset="0"/>
-                            <a:ea typeface="+mn-ea"/>
-                            <a:cs typeface="+mn-cs"/>
-                          </a:rPr>
-                          <m:t>𝑛</m:t>
-                        </m:r>
-                      </m:sup>
-                    </m:sSup>
-                  </m:oMath>
-                </a14:m>
-                <a:r>
-                  <a:rPr lang="en-US" dirty="0"/>
-                  <a:t>defined by finitely many linear inequalities:</a:t>
-                </a:r>
-              </a:p>
-              <a:p>
-                <a:pPr/>
-                <a14:m>
-                  <m:oMathPara xmlns:m="http://schemas.openxmlformats.org/officeDocument/2006/math">
-                    <m:oMathParaPr>
-                      <m:jc m:val="centerGroup"/>
-                    </m:oMathParaPr>
-                    <m:oMath xmlns:m="http://schemas.openxmlformats.org/officeDocument/2006/math">
-                      <m:r>
-                        <a:rPr lang="en-US" sz="1200" i="1" kern="1200">
-                          <a:solidFill>
-                            <a:schemeClr val="tx1"/>
-                          </a:solidFill>
-                          <a:latin typeface="Cambria Math" panose="02040503050406030204" pitchFamily="18" charset="0"/>
-                          <a:ea typeface="+mn-ea"/>
-                          <a:cs typeface="+mn-cs"/>
-                        </a:rPr>
-                        <m:t>𝑃</m:t>
-                      </m:r>
-                      <m:r>
-                        <a:rPr lang="en-US" sz="1200" i="0" kern="1200">
-                          <a:solidFill>
-                            <a:schemeClr val="tx1"/>
-                          </a:solidFill>
-                          <a:latin typeface="Cambria Math" panose="02040503050406030204" pitchFamily="18" charset="0"/>
-                          <a:ea typeface="+mn-ea"/>
-                          <a:cs typeface="+mn-cs"/>
-                        </a:rPr>
-                        <m:t>=</m:t>
-                      </m:r>
-                      <m:d>
-                        <m:dPr>
-                          <m:begChr m:val="{"/>
-                          <m:endChr m:val="}"/>
-                          <m:ctrlPr>
-                            <a:rPr lang="ar-AE" sz="1200" i="1" kern="1200">
-                              <a:solidFill>
-                                <a:schemeClr val="tx1"/>
-                              </a:solidFill>
-                              <a:latin typeface="Cambria Math" panose="02040503050406030204" pitchFamily="18" charset="0"/>
-                              <a:ea typeface="+mn-ea"/>
-                              <a:cs typeface="+mn-cs"/>
-                            </a:rPr>
-                          </m:ctrlPr>
-                        </m:dPr>
-                        <m:e>
-                          <m:r>
-                            <a:rPr lang="ar-AE" sz="1200" i="1" kern="1200">
-                              <a:solidFill>
-                                <a:schemeClr val="tx1"/>
-                              </a:solidFill>
-                              <a:latin typeface="Cambria Math" panose="02040503050406030204" pitchFamily="18" charset="0"/>
-                              <a:ea typeface="+mn-ea"/>
-                              <a:cs typeface="+mn-cs"/>
-                            </a:rPr>
-                            <m:t>𝑥</m:t>
-                          </m:r>
-                          <m:r>
-                            <a:rPr lang="ar-AE" sz="1200" i="0" kern="1200">
-                              <a:solidFill>
-                                <a:schemeClr val="tx1"/>
-                              </a:solidFill>
-                              <a:latin typeface="Cambria Math" panose="02040503050406030204" pitchFamily="18" charset="0"/>
-                              <a:ea typeface="+mn-ea"/>
-                              <a:cs typeface="+mn-cs"/>
-                            </a:rPr>
-                            <m:t>∈</m:t>
-                          </m:r>
-                          <m:sSup>
-                            <m:sSupPr>
-                              <m:ctrlPr>
-                                <a:rPr lang="ar-AE" sz="1200" i="1" kern="1200">
-                                  <a:solidFill>
-                                    <a:schemeClr val="tx1"/>
-                                  </a:solidFill>
-                                  <a:latin typeface="Cambria Math" panose="02040503050406030204" pitchFamily="18" charset="0"/>
-                                  <a:ea typeface="+mn-ea"/>
-                                  <a:cs typeface="+mn-cs"/>
-                                </a:rPr>
-                              </m:ctrlPr>
-                            </m:sSupPr>
-                            <m:e>
-                              <m:r>
-                                <a:rPr lang="ar-AE" sz="1200" i="0" kern="1200">
-                                  <a:solidFill>
-                                    <a:schemeClr val="tx1"/>
-                                  </a:solidFill>
-                                  <a:latin typeface="Cambria Math" panose="02040503050406030204" pitchFamily="18" charset="0"/>
-                                  <a:ea typeface="+mn-ea"/>
-                                  <a:cs typeface="+mn-cs"/>
-                                </a:rPr>
-                                <m:t>ℝ</m:t>
-                              </m:r>
-                            </m:e>
-                            <m:sup>
-                              <m:r>
-                                <a:rPr lang="ar-AE" sz="1200" i="1" kern="1200">
-                                  <a:solidFill>
-                                    <a:schemeClr val="tx1"/>
-                                  </a:solidFill>
-                                  <a:latin typeface="Cambria Math" panose="02040503050406030204" pitchFamily="18" charset="0"/>
-                                  <a:ea typeface="+mn-ea"/>
-                                  <a:cs typeface="+mn-cs"/>
-                                </a:rPr>
-                                <m:t>𝑛</m:t>
-                              </m:r>
-                            </m:sup>
-                          </m:sSup>
-                          <m:r>
-                            <a:rPr lang="ar-AE" sz="1200" i="0" kern="1200">
-                              <a:solidFill>
-                                <a:schemeClr val="tx1"/>
-                              </a:solidFill>
-                              <a:latin typeface="Cambria Math" panose="02040503050406030204" pitchFamily="18" charset="0"/>
-                              <a:ea typeface="+mn-ea"/>
-                              <a:cs typeface="+mn-cs"/>
-                            </a:rPr>
-                            <m:t>:</m:t>
-                          </m:r>
-                          <m:r>
-                            <a:rPr lang="ar-AE" sz="1200" i="1" kern="1200">
-                              <a:solidFill>
-                                <a:schemeClr val="tx1"/>
-                              </a:solidFill>
-                              <a:latin typeface="Cambria Math" panose="02040503050406030204" pitchFamily="18" charset="0"/>
-                              <a:ea typeface="+mn-ea"/>
-                              <a:cs typeface="+mn-cs"/>
-                            </a:rPr>
-                            <m:t>𝐴𝑥</m:t>
-                          </m:r>
-                          <m:r>
-                            <a:rPr lang="ar-AE" sz="1200" i="0" kern="1200">
-                              <a:solidFill>
-                                <a:schemeClr val="tx1"/>
-                              </a:solidFill>
-                              <a:latin typeface="Cambria Math" panose="02040503050406030204" pitchFamily="18" charset="0"/>
-                              <a:ea typeface="+mn-ea"/>
-                              <a:cs typeface="+mn-cs"/>
-                            </a:rPr>
-                            <m:t>≤</m:t>
-                          </m:r>
-                          <m:r>
-                            <a:rPr lang="ar-AE" sz="1200" i="1" kern="1200">
-                              <a:solidFill>
-                                <a:schemeClr val="tx1"/>
-                              </a:solidFill>
-                              <a:latin typeface="Cambria Math" panose="02040503050406030204" pitchFamily="18" charset="0"/>
-                              <a:ea typeface="+mn-ea"/>
-                              <a:cs typeface="+mn-cs"/>
-                            </a:rPr>
-                            <m:t>𝑏</m:t>
-                          </m:r>
-                        </m:e>
-                      </m:d>
-                    </m:oMath>
-                  </m:oMathPara>
-                </a14:m>
-                <a:endParaRPr lang="ar-AE" dirty="0"/>
-              </a:p>
-              <a:p>
                 <a:endParaRPr lang="en-US" dirty="0"/>
-              </a:p>
-              <a:p>
-                <a:endParaRPr lang="en-US" dirty="0"/>
-              </a:p>
-              <a:p>
-                <a:r>
-                  <a:rPr lang="en-US" dirty="0"/>
-                  <a:t>%%%</a:t>
-                </a:r>
-              </a:p>
-              <a:p>
-                <a:endParaRPr lang="en-US" dirty="0"/>
-              </a:p>
-              <a:p>
-                <a:r>
-                  <a:rPr lang="en-US" dirty="0"/>
-                  <a:t>A </a:t>
-                </a:r>
-                <a:r>
-                  <a:rPr lang="en-US" b="1" dirty="0"/>
-                  <a:t>polyhedron</a:t>
-                </a:r>
-                <a:r>
-                  <a:rPr lang="en-US" dirty="0"/>
-                  <a:t> (plural: </a:t>
-                </a:r>
-                <a:r>
-                  <a:rPr lang="en-US" b="1" dirty="0" err="1"/>
-                  <a:t>polyhedra</a:t>
-                </a:r>
-                <a:r>
-                  <a:rPr lang="en-US" dirty="0"/>
-                  <a:t>) is a three-dimensional geometric solid made up of a finite number of flat polygonal faces.</a:t>
-                </a:r>
-              </a:p>
-              <a:p>
-                <a:endParaRPr lang="en-US" dirty="0"/>
-              </a:p>
-              <a:p>
-                <a:r>
-                  <a:rPr lang="en-US" dirty="0"/>
-                  <a:t>A </a:t>
-                </a:r>
-                <a:r>
-                  <a:rPr lang="en-US" b="1" dirty="0"/>
-                  <a:t>polytope</a:t>
-                </a:r>
-                <a:r>
-                  <a:rPr lang="en-US" dirty="0"/>
-                  <a:t> is a geometric object in any number of dimensions defined by flat “faces” of appropriate dimension:</a:t>
-                </a:r>
-              </a:p>
-              <a:p>
-                <a:endParaRPr lang="en-US" dirty="0"/>
-              </a:p>
-              <a:p>
-                <a:r>
-                  <a:rPr lang="en-US" dirty="0"/>
-                  <a:t>A convex polytope is also the </a:t>
-                </a:r>
-                <a:r>
-                  <a:rPr lang="en-US" b="1" dirty="0"/>
-                  <a:t>intersection of finitely many linear inequalities</a:t>
-                </a:r>
-                <a:r>
-                  <a:rPr lang="en-US" dirty="0"/>
-                  <a:t>:</a:t>
-                </a:r>
-              </a:p>
-              <a:p>
-                <a:endParaRPr lang="en-US" dirty="0"/>
-              </a:p>
-              <a:p>
-                <a:r>
-                  <a:rPr lang="en-US" dirty="0"/>
-                  <a:t>the set of all </a:t>
-                </a:r>
-                <a:r>
-                  <a:rPr lang="en-US" i="1" dirty="0"/>
-                  <a:t>admissible states and inputs</a:t>
-                </a:r>
-                <a:r>
-                  <a:rPr lang="en-US" dirty="0"/>
-                  <a:t> is described by </a:t>
-                </a:r>
-                <a:r>
-                  <a:rPr lang="en-US" b="1" dirty="0"/>
-                  <a:t>linear inequalities</a:t>
-                </a:r>
-                <a:r>
-                  <a:rPr lang="en-US" dirty="0"/>
-                  <a:t>, i.e., it is a </a:t>
-                </a:r>
-                <a:r>
-                  <a:rPr lang="en-US" b="1" dirty="0"/>
-                  <a:t>convex polyhedral set</a:t>
-                </a:r>
-                <a:r>
-                  <a:rPr lang="en-US" dirty="0"/>
-                  <a:t>.</a:t>
-                </a:r>
               </a:p>
             </p:txBody>
           </p:sp>
@@ -1914,6 +1104,90 @@
         </p:nvSpPr>
         <p:spPr/>
       </p:sp>
+      <p:sp>
+        <p:nvSpPr>
+          <p:cNvPr id="3" name="Notes Placeholder 2"/>
+          <p:cNvSpPr>
+            <a:spLocks noGrp="1"/>
+          </p:cNvSpPr>
+          <p:nvPr>
+            <p:ph type="body" idx="1"/>
+          </p:nvPr>
+        </p:nvSpPr>
+        <p:spPr/>
+        <p:txBody>
+          <a:bodyPr/>
+          <a:lstStyle/>
+          <a:p>
+            <a:endParaRPr lang="en-US" dirty="0"/>
+          </a:p>
+        </p:txBody>
+      </p:sp>
+      <p:sp>
+        <p:nvSpPr>
+          <p:cNvPr id="4" name="Slide Number Placeholder 3"/>
+          <p:cNvSpPr>
+            <a:spLocks noGrp="1"/>
+          </p:cNvSpPr>
+          <p:nvPr>
+            <p:ph type="sldNum" sz="quarter" idx="5"/>
+          </p:nvPr>
+        </p:nvSpPr>
+        <p:spPr/>
+        <p:txBody>
+          <a:bodyPr/>
+          <a:lstStyle/>
+          <a:p>
+            <a:fld id="{63B2D7EC-928D-0645-AAE8-498D7443D60E}" type="slidenum">
+              <a:rPr lang="en-US" smtClean="0"/>
+              <a:t>8</a:t>
+            </a:fld>
+            <a:endParaRPr lang="en-US"/>
+          </a:p>
+        </p:txBody>
+      </p:sp>
+    </p:spTree>
+    <p:extLst>
+      <p:ext uri="{BB962C8B-B14F-4D97-AF65-F5344CB8AC3E}">
+        <p14:creationId xmlns:p14="http://schemas.microsoft.com/office/powerpoint/2010/main" val="2317619818"/>
+      </p:ext>
+    </p:extLst>
+  </p:cSld>
+  <p:clrMapOvr>
+    <a:masterClrMapping/>
+  </p:clrMapOvr>
+</p:notes>
+</file>
+
+<file path=ppt/notesSlides/notesSlide6.xml><?xml version="1.0" encoding="utf-8"?>
+<p:notes xmlns:a="http://schemas.openxmlformats.org/drawingml/2006/main" xmlns:r="http://schemas.openxmlformats.org/officeDocument/2006/relationships" xmlns:p="http://schemas.openxmlformats.org/presentationml/2006/main">
+  <p:cSld>
+    <p:spTree>
+      <p:nvGrpSpPr>
+        <p:cNvPr id="1" name=""/>
+        <p:cNvGrpSpPr/>
+        <p:nvPr/>
+      </p:nvGrpSpPr>
+      <p:grpSpPr>
+        <a:xfrm>
+          <a:off x="0" y="0"/>
+          <a:ext cx="0" cy="0"/>
+          <a:chOff x="0" y="0"/>
+          <a:chExt cx="0" cy="0"/>
+        </a:xfrm>
+      </p:grpSpPr>
+      <p:sp>
+        <p:nvSpPr>
+          <p:cNvPr id="2" name="Slide Image Placeholder 1"/>
+          <p:cNvSpPr>
+            <a:spLocks noGrp="1" noRot="1" noChangeAspect="1"/>
+          </p:cNvSpPr>
+          <p:nvPr>
+            <p:ph type="sldImg"/>
+          </p:nvPr>
+        </p:nvSpPr>
+        <p:spPr/>
+      </p:sp>
       <mc:AlternateContent xmlns:mc="http://schemas.openxmlformats.org/markup-compatibility/2006" xmlns:a14="http://schemas.microsoft.com/office/drawing/2010/main">
         <mc:Choice Requires="a14">
           <p:sp>
@@ -1930,603 +1204,6 @@
             <p:txBody>
               <a:bodyPr/>
               <a:lstStyle/>
-              <a:p>
-                <a:r>
-                  <a:rPr lang="en-US" dirty="0"/>
-                  <a:t>For a vector </a:t>
-                </a:r>
-                <a14:m>
-                  <m:oMath xmlns:m="http://schemas.openxmlformats.org/officeDocument/2006/math">
-                    <m:r>
-                      <a:rPr lang="en-US" sz="1200" i="1" kern="1200">
-                        <a:solidFill>
-                          <a:schemeClr val="tx1"/>
-                        </a:solidFill>
-                        <a:latin typeface="Cambria Math" panose="02040503050406030204" pitchFamily="18" charset="0"/>
-                        <a:ea typeface="+mn-ea"/>
-                        <a:cs typeface="+mn-cs"/>
-                      </a:rPr>
-                      <m:t>𝑥</m:t>
-                    </m:r>
-                    <m:r>
-                      <a:rPr lang="en-US" sz="1200" i="0" kern="1200">
-                        <a:solidFill>
-                          <a:schemeClr val="tx1"/>
-                        </a:solidFill>
-                        <a:latin typeface="Cambria Math" panose="02040503050406030204" pitchFamily="18" charset="0"/>
-                        <a:ea typeface="+mn-ea"/>
-                        <a:cs typeface="+mn-cs"/>
-                      </a:rPr>
-                      <m:t>∈</m:t>
-                    </m:r>
-                    <m:sSup>
-                      <m:sSupPr>
-                        <m:ctrlPr>
-                          <a:rPr lang="ar-AE" sz="1200" i="1" kern="1200">
-                            <a:solidFill>
-                              <a:schemeClr val="tx1"/>
-                            </a:solidFill>
-                            <a:latin typeface="Cambria Math" panose="02040503050406030204" pitchFamily="18" charset="0"/>
-                            <a:ea typeface="+mn-ea"/>
-                            <a:cs typeface="+mn-cs"/>
-                          </a:rPr>
-                        </m:ctrlPr>
-                      </m:sSupPr>
-                      <m:e>
-                        <m:r>
-                          <a:rPr lang="ar-AE" sz="1200" i="0" kern="1200">
-                            <a:solidFill>
-                              <a:schemeClr val="tx1"/>
-                            </a:solidFill>
-                            <a:latin typeface="Cambria Math" panose="02040503050406030204" pitchFamily="18" charset="0"/>
-                            <a:ea typeface="+mn-ea"/>
-                            <a:cs typeface="+mn-cs"/>
-                          </a:rPr>
-                          <m:t>ℝ</m:t>
-                        </m:r>
-                      </m:e>
-                      <m:sup>
-                        <m:r>
-                          <a:rPr lang="ar-AE" sz="1200" i="1" kern="1200">
-                            <a:solidFill>
-                              <a:schemeClr val="tx1"/>
-                            </a:solidFill>
-                            <a:latin typeface="Cambria Math" panose="02040503050406030204" pitchFamily="18" charset="0"/>
-                            <a:ea typeface="+mn-ea"/>
-                            <a:cs typeface="+mn-cs"/>
-                          </a:rPr>
-                          <m:t>𝑛</m:t>
-                        </m:r>
-                      </m:sup>
-                    </m:sSup>
-                  </m:oMath>
-                </a14:m>
-                <a:r>
-                  <a:rPr lang="ar-AE" dirty="0"/>
-                  <a:t>:</a:t>
-                </a:r>
-              </a:p>
-              <a:p>
-                <a:pPr/>
-                <a14:m>
-                  <m:oMathPara xmlns:m="http://schemas.openxmlformats.org/officeDocument/2006/math">
-                    <m:oMathParaPr>
-                      <m:jc m:val="centerGroup"/>
-                    </m:oMathParaPr>
-                    <m:oMath xmlns:m="http://schemas.openxmlformats.org/officeDocument/2006/math">
-                      <m:r>
-                        <a:rPr lang="ar-AE" sz="1200" kern="1200">
-                          <a:solidFill>
-                            <a:schemeClr val="tx1"/>
-                          </a:solidFill>
-                          <a:latin typeface="Cambria Math" panose="02040503050406030204" pitchFamily="18" charset="0"/>
-                          <a:ea typeface="+mn-ea"/>
-                          <a:cs typeface="+mn-cs"/>
-                        </a:rPr>
-                        <m:t>∥</m:t>
-                      </m:r>
-                      <m:r>
-                        <a:rPr lang="ar-AE" sz="1200" i="1" kern="1200">
-                          <a:solidFill>
-                            <a:schemeClr val="tx1"/>
-                          </a:solidFill>
-                          <a:latin typeface="Cambria Math" panose="02040503050406030204" pitchFamily="18" charset="0"/>
-                          <a:ea typeface="+mn-ea"/>
-                          <a:cs typeface="+mn-cs"/>
-                        </a:rPr>
-                        <m:t>𝑥</m:t>
-                      </m:r>
-                      <m:sSub>
-                        <m:sSubPr>
-                          <m:ctrlPr>
-                            <a:rPr lang="ar-AE" sz="1200" i="1" kern="1200">
-                              <a:solidFill>
-                                <a:schemeClr val="tx1"/>
-                              </a:solidFill>
-                              <a:latin typeface="Cambria Math" panose="02040503050406030204" pitchFamily="18" charset="0"/>
-                              <a:ea typeface="+mn-ea"/>
-                              <a:cs typeface="+mn-cs"/>
-                            </a:rPr>
-                          </m:ctrlPr>
-                        </m:sSubPr>
-                        <m:e>
-                          <m:r>
-                            <a:rPr lang="ar-AE" sz="1200" i="0" kern="1200">
-                              <a:solidFill>
-                                <a:schemeClr val="tx1"/>
-                              </a:solidFill>
-                              <a:latin typeface="Cambria Math" panose="02040503050406030204" pitchFamily="18" charset="0"/>
-                              <a:ea typeface="+mn-ea"/>
-                              <a:cs typeface="+mn-cs"/>
-                            </a:rPr>
-                            <m:t>∥</m:t>
-                          </m:r>
-                        </m:e>
-                        <m:sub>
-                          <m:r>
-                            <a:rPr lang="ar-AE" sz="1200" i="0" kern="1200">
-                              <a:solidFill>
-                                <a:schemeClr val="tx1"/>
-                              </a:solidFill>
-                              <a:latin typeface="Cambria Math" panose="02040503050406030204" pitchFamily="18" charset="0"/>
-                              <a:ea typeface="+mn-ea"/>
-                              <a:cs typeface="+mn-cs"/>
-                            </a:rPr>
-                            <m:t>1</m:t>
-                          </m:r>
-                        </m:sub>
-                      </m:sSub>
-                      <m:r>
-                        <a:rPr lang="ar-AE" sz="1200" i="0" kern="1200">
-                          <a:solidFill>
-                            <a:schemeClr val="tx1"/>
-                          </a:solidFill>
-                          <a:latin typeface="Cambria Math" panose="02040503050406030204" pitchFamily="18" charset="0"/>
-                          <a:ea typeface="+mn-ea"/>
-                          <a:cs typeface="+mn-cs"/>
-                        </a:rPr>
-                        <m:t>=</m:t>
-                      </m:r>
-                      <m:nary>
-                        <m:naryPr>
-                          <m:chr m:val="∑"/>
-                          <m:grow m:val="on"/>
-                          <m:ctrlPr>
-                            <a:rPr lang="ar-AE" sz="1200" i="1" kern="1200">
-                              <a:solidFill>
-                                <a:schemeClr val="tx1"/>
-                              </a:solidFill>
-                              <a:latin typeface="Cambria Math" panose="02040503050406030204" pitchFamily="18" charset="0"/>
-                              <a:ea typeface="+mn-ea"/>
-                              <a:cs typeface="+mn-cs"/>
-                            </a:rPr>
-                          </m:ctrlPr>
-                        </m:naryPr>
-                        <m:sub>
-                          <m:r>
-                            <a:rPr lang="ar-AE" sz="1200" i="1" kern="1200">
-                              <a:solidFill>
-                                <a:schemeClr val="tx1"/>
-                              </a:solidFill>
-                              <a:latin typeface="Cambria Math" panose="02040503050406030204" pitchFamily="18" charset="0"/>
-                              <a:ea typeface="+mn-ea"/>
-                              <a:cs typeface="+mn-cs"/>
-                            </a:rPr>
-                            <m:t>𝑖</m:t>
-                          </m:r>
-                          <m:r>
-                            <a:rPr lang="ar-AE" sz="1200" i="0" kern="1200">
-                              <a:solidFill>
-                                <a:schemeClr val="tx1"/>
-                              </a:solidFill>
-                              <a:latin typeface="Cambria Math" panose="02040503050406030204" pitchFamily="18" charset="0"/>
-                              <a:ea typeface="+mn-ea"/>
-                              <a:cs typeface="+mn-cs"/>
-                            </a:rPr>
-                            <m:t>=1</m:t>
-                          </m:r>
-                        </m:sub>
-                        <m:sup>
-                          <m:r>
-                            <a:rPr lang="ar-AE" sz="1200" i="1" kern="1200">
-                              <a:solidFill>
-                                <a:schemeClr val="tx1"/>
-                              </a:solidFill>
-                              <a:latin typeface="Cambria Math" panose="02040503050406030204" pitchFamily="18" charset="0"/>
-                              <a:ea typeface="+mn-ea"/>
-                              <a:cs typeface="+mn-cs"/>
-                            </a:rPr>
-                            <m:t>𝑛</m:t>
-                          </m:r>
-                        </m:sup>
-                        <m:e>
-                          <m:r>
-                            <a:rPr lang="ar-AE" sz="1200" i="0" kern="1200">
-                              <a:solidFill>
-                                <a:schemeClr val="tx1"/>
-                              </a:solidFill>
-                              <a:latin typeface="Cambria Math" panose="02040503050406030204" pitchFamily="18" charset="0"/>
-                              <a:ea typeface="+mn-ea"/>
-                              <a:cs typeface="+mn-cs"/>
-                            </a:rPr>
-                            <m:t>∣</m:t>
-                          </m:r>
-                        </m:e>
-                      </m:nary>
-                      <m:sSub>
-                        <m:sSubPr>
-                          <m:ctrlPr>
-                            <a:rPr lang="ar-AE" sz="1200" i="1" kern="1200">
-                              <a:solidFill>
-                                <a:schemeClr val="tx1"/>
-                              </a:solidFill>
-                              <a:latin typeface="Cambria Math" panose="02040503050406030204" pitchFamily="18" charset="0"/>
-                              <a:ea typeface="+mn-ea"/>
-                              <a:cs typeface="+mn-cs"/>
-                            </a:rPr>
-                          </m:ctrlPr>
-                        </m:sSubPr>
-                        <m:e>
-                          <m:r>
-                            <a:rPr lang="ar-AE" sz="1200" i="1" kern="1200">
-                              <a:solidFill>
-                                <a:schemeClr val="tx1"/>
-                              </a:solidFill>
-                              <a:latin typeface="Cambria Math" panose="02040503050406030204" pitchFamily="18" charset="0"/>
-                              <a:ea typeface="+mn-ea"/>
-                              <a:cs typeface="+mn-cs"/>
-                            </a:rPr>
-                            <m:t>𝑥</m:t>
-                          </m:r>
-                        </m:e>
-                        <m:sub>
-                          <m:r>
-                            <a:rPr lang="ar-AE" sz="1200" i="1" kern="1200">
-                              <a:solidFill>
-                                <a:schemeClr val="tx1"/>
-                              </a:solidFill>
-                              <a:latin typeface="Cambria Math" panose="02040503050406030204" pitchFamily="18" charset="0"/>
-                              <a:ea typeface="+mn-ea"/>
-                              <a:cs typeface="+mn-cs"/>
-                            </a:rPr>
-                            <m:t>𝑖</m:t>
-                          </m:r>
-                        </m:sub>
-                      </m:sSub>
-                      <m:r>
-                        <a:rPr lang="ar-AE" sz="1200" i="0" kern="1200">
-                          <a:solidFill>
-                            <a:schemeClr val="tx1"/>
-                          </a:solidFill>
-                          <a:latin typeface="Cambria Math" panose="02040503050406030204" pitchFamily="18" charset="0"/>
-                          <a:ea typeface="+mn-ea"/>
-                          <a:cs typeface="+mn-cs"/>
-                        </a:rPr>
-                        <m:t>∣</m:t>
-                      </m:r>
-                    </m:oMath>
-                  </m:oMathPara>
-                </a14:m>
-                <a:endParaRPr lang="ar-AE" dirty="0"/>
-              </a:p>
-              <a:p>
-                <a:endParaRPr lang="en-US" dirty="0"/>
-              </a:p>
-              <a:p>
-                <a:r>
-                  <a:rPr lang="en-US" dirty="0"/>
-                  <a:t>For a vector </a:t>
-                </a:r>
-                <a14:m>
-                  <m:oMath xmlns:m="http://schemas.openxmlformats.org/officeDocument/2006/math">
-                    <m:r>
-                      <a:rPr lang="en-US" sz="1200" i="1" kern="1200">
-                        <a:solidFill>
-                          <a:schemeClr val="tx1"/>
-                        </a:solidFill>
-                        <a:latin typeface="Cambria Math" panose="02040503050406030204" pitchFamily="18" charset="0"/>
-                        <a:ea typeface="+mn-ea"/>
-                        <a:cs typeface="+mn-cs"/>
-                      </a:rPr>
-                      <m:t>𝑥</m:t>
-                    </m:r>
-                    <m:r>
-                      <a:rPr lang="en-US" sz="1200" i="0" kern="1200">
-                        <a:solidFill>
-                          <a:schemeClr val="tx1"/>
-                        </a:solidFill>
-                        <a:latin typeface="Cambria Math" panose="02040503050406030204" pitchFamily="18" charset="0"/>
-                        <a:ea typeface="+mn-ea"/>
-                        <a:cs typeface="+mn-cs"/>
-                      </a:rPr>
-                      <m:t>∈</m:t>
-                    </m:r>
-                    <m:sSup>
-                      <m:sSupPr>
-                        <m:ctrlPr>
-                          <a:rPr lang="ar-AE" sz="1200" i="1" kern="1200">
-                            <a:solidFill>
-                              <a:schemeClr val="tx1"/>
-                            </a:solidFill>
-                            <a:latin typeface="Cambria Math" panose="02040503050406030204" pitchFamily="18" charset="0"/>
-                            <a:ea typeface="+mn-ea"/>
-                            <a:cs typeface="+mn-cs"/>
-                          </a:rPr>
-                        </m:ctrlPr>
-                      </m:sSupPr>
-                      <m:e>
-                        <m:r>
-                          <a:rPr lang="ar-AE" sz="1200" i="0" kern="1200">
-                            <a:solidFill>
-                              <a:schemeClr val="tx1"/>
-                            </a:solidFill>
-                            <a:latin typeface="Cambria Math" panose="02040503050406030204" pitchFamily="18" charset="0"/>
-                            <a:ea typeface="+mn-ea"/>
-                            <a:cs typeface="+mn-cs"/>
-                          </a:rPr>
-                          <m:t>ℝ</m:t>
-                        </m:r>
-                      </m:e>
-                      <m:sup>
-                        <m:r>
-                          <a:rPr lang="ar-AE" sz="1200" i="1" kern="1200">
-                            <a:solidFill>
-                              <a:schemeClr val="tx1"/>
-                            </a:solidFill>
-                            <a:latin typeface="Cambria Math" panose="02040503050406030204" pitchFamily="18" charset="0"/>
-                            <a:ea typeface="+mn-ea"/>
-                            <a:cs typeface="+mn-cs"/>
-                          </a:rPr>
-                          <m:t>𝑛</m:t>
-                        </m:r>
-                      </m:sup>
-                    </m:sSup>
-                  </m:oMath>
-                </a14:m>
-                <a:r>
-                  <a:rPr lang="ar-AE" dirty="0"/>
-                  <a:t>:</a:t>
-                </a:r>
-              </a:p>
-              <a:p>
-                <a:pPr/>
-                <a14:m>
-                  <m:oMathPara xmlns:m="http://schemas.openxmlformats.org/officeDocument/2006/math">
-                    <m:oMathParaPr>
-                      <m:jc m:val="centerGroup"/>
-                    </m:oMathParaPr>
-                    <m:oMath xmlns:m="http://schemas.openxmlformats.org/officeDocument/2006/math">
-                      <m:r>
-                        <a:rPr lang="ar-AE" sz="1200" kern="1200">
-                          <a:solidFill>
-                            <a:schemeClr val="tx1"/>
-                          </a:solidFill>
-                          <a:latin typeface="Cambria Math" panose="02040503050406030204" pitchFamily="18" charset="0"/>
-                          <a:ea typeface="+mn-ea"/>
-                          <a:cs typeface="+mn-cs"/>
-                        </a:rPr>
-                        <m:t>∥</m:t>
-                      </m:r>
-                      <m:r>
-                        <a:rPr lang="ar-AE" sz="1200" i="1" kern="1200">
-                          <a:solidFill>
-                            <a:schemeClr val="tx1"/>
-                          </a:solidFill>
-                          <a:latin typeface="Cambria Math" panose="02040503050406030204" pitchFamily="18" charset="0"/>
-                          <a:ea typeface="+mn-ea"/>
-                          <a:cs typeface="+mn-cs"/>
-                        </a:rPr>
-                        <m:t>𝑥</m:t>
-                      </m:r>
-                      <m:sSub>
-                        <m:sSubPr>
-                          <m:ctrlPr>
-                            <a:rPr lang="ar-AE" sz="1200" i="1" kern="1200">
-                              <a:solidFill>
-                                <a:schemeClr val="tx1"/>
-                              </a:solidFill>
-                              <a:latin typeface="Cambria Math" panose="02040503050406030204" pitchFamily="18" charset="0"/>
-                              <a:ea typeface="+mn-ea"/>
-                              <a:cs typeface="+mn-cs"/>
-                            </a:rPr>
-                          </m:ctrlPr>
-                        </m:sSubPr>
-                        <m:e>
-                          <m:r>
-                            <a:rPr lang="ar-AE" sz="1200" i="0" kern="1200">
-                              <a:solidFill>
-                                <a:schemeClr val="tx1"/>
-                              </a:solidFill>
-                              <a:latin typeface="Cambria Math" panose="02040503050406030204" pitchFamily="18" charset="0"/>
-                              <a:ea typeface="+mn-ea"/>
-                              <a:cs typeface="+mn-cs"/>
-                            </a:rPr>
-                            <m:t>∥</m:t>
-                          </m:r>
-                        </m:e>
-                        <m:sub>
-                          <m:r>
-                            <a:rPr lang="ar-AE" sz="1200" i="0" kern="1200">
-                              <a:solidFill>
-                                <a:schemeClr val="tx1"/>
-                              </a:solidFill>
-                              <a:latin typeface="Cambria Math" panose="02040503050406030204" pitchFamily="18" charset="0"/>
-                              <a:ea typeface="+mn-ea"/>
-                              <a:cs typeface="+mn-cs"/>
-                            </a:rPr>
-                            <m:t>∞</m:t>
-                          </m:r>
-                        </m:sub>
-                      </m:sSub>
-                      <m:r>
-                        <a:rPr lang="ar-AE" sz="1200" i="0" kern="1200">
-                          <a:solidFill>
-                            <a:schemeClr val="tx1"/>
-                          </a:solidFill>
-                          <a:latin typeface="Cambria Math" panose="02040503050406030204" pitchFamily="18" charset="0"/>
-                          <a:ea typeface="+mn-ea"/>
-                          <a:cs typeface="+mn-cs"/>
-                        </a:rPr>
-                        <m:t>=</m:t>
-                      </m:r>
-                      <m:limLow>
-                        <m:limLowPr>
-                          <m:ctrlPr>
-                            <a:rPr lang="ar-AE" sz="1200" i="1" kern="1200">
-                              <a:solidFill>
-                                <a:schemeClr val="tx1"/>
-                              </a:solidFill>
-                              <a:latin typeface="Cambria Math" panose="02040503050406030204" pitchFamily="18" charset="0"/>
-                              <a:ea typeface="+mn-ea"/>
-                              <a:cs typeface="+mn-cs"/>
-                            </a:rPr>
-                          </m:ctrlPr>
-                        </m:limLowPr>
-                        <m:e>
-                          <m:func>
-                            <m:funcPr>
-                              <m:ctrlPr>
-                                <a:rPr lang="ar-AE" sz="1200" i="1" kern="1200">
-                                  <a:solidFill>
-                                    <a:schemeClr val="tx1"/>
-                                  </a:solidFill>
-                                  <a:latin typeface="Cambria Math" panose="02040503050406030204" pitchFamily="18" charset="0"/>
-                                  <a:ea typeface="+mn-ea"/>
-                                  <a:cs typeface="+mn-cs"/>
-                                </a:rPr>
-                              </m:ctrlPr>
-                            </m:funcPr>
-                            <m:fName>
-                              <m:r>
-                                <m:rPr>
-                                  <m:sty m:val="p"/>
-                                </m:rPr>
-                                <a:rPr lang="en-US" sz="1200" i="0" kern="1200">
-                                  <a:solidFill>
-                                    <a:schemeClr val="tx1"/>
-                                  </a:solidFill>
-                                  <a:latin typeface="Cambria Math" panose="02040503050406030204" pitchFamily="18" charset="0"/>
-                                  <a:ea typeface="+mn-ea"/>
-                                  <a:cs typeface="+mn-cs"/>
-                                </a:rPr>
-                                <m:t>max</m:t>
-                              </m:r>
-                            </m:fName>
-                            <m:e/>
-                          </m:func>
-                        </m:e>
-                        <m:lim>
-                          <m:r>
-                            <a:rPr lang="ar-AE" sz="1200" i="1" kern="1200">
-                              <a:solidFill>
-                                <a:schemeClr val="tx1"/>
-                              </a:solidFill>
-                              <a:latin typeface="Cambria Math" panose="02040503050406030204" pitchFamily="18" charset="0"/>
-                              <a:ea typeface="+mn-ea"/>
-                              <a:cs typeface="+mn-cs"/>
-                            </a:rPr>
-                            <m:t>𝑖</m:t>
-                          </m:r>
-                          <m:r>
-                            <a:rPr lang="ar-AE" sz="1200" i="0" kern="1200">
-                              <a:solidFill>
-                                <a:schemeClr val="tx1"/>
-                              </a:solidFill>
-                              <a:latin typeface="Cambria Math" panose="02040503050406030204" pitchFamily="18" charset="0"/>
-                              <a:ea typeface="+mn-ea"/>
-                              <a:cs typeface="+mn-cs"/>
-                            </a:rPr>
-                            <m:t>=1,…,</m:t>
-                          </m:r>
-                          <m:r>
-                            <a:rPr lang="ar-AE" sz="1200" i="1" kern="1200">
-                              <a:solidFill>
-                                <a:schemeClr val="tx1"/>
-                              </a:solidFill>
-                              <a:latin typeface="Cambria Math" panose="02040503050406030204" pitchFamily="18" charset="0"/>
-                              <a:ea typeface="+mn-ea"/>
-                              <a:cs typeface="+mn-cs"/>
-                            </a:rPr>
-                            <m:t>𝑛</m:t>
-                          </m:r>
-                        </m:lim>
-                      </m:limLow>
-                      <m:r>
-                        <a:rPr lang="ar-AE" sz="1200" i="0" kern="1200">
-                          <a:solidFill>
-                            <a:schemeClr val="tx1"/>
-                          </a:solidFill>
-                          <a:latin typeface="Cambria Math" panose="02040503050406030204" pitchFamily="18" charset="0"/>
-                          <a:ea typeface="+mn-ea"/>
-                          <a:cs typeface="+mn-cs"/>
-                        </a:rPr>
-                        <m:t>∣</m:t>
-                      </m:r>
-                      <m:sSub>
-                        <m:sSubPr>
-                          <m:ctrlPr>
-                            <a:rPr lang="ar-AE" sz="1200" i="1" kern="1200">
-                              <a:solidFill>
-                                <a:schemeClr val="tx1"/>
-                              </a:solidFill>
-                              <a:latin typeface="Cambria Math" panose="02040503050406030204" pitchFamily="18" charset="0"/>
-                              <a:ea typeface="+mn-ea"/>
-                              <a:cs typeface="+mn-cs"/>
-                            </a:rPr>
-                          </m:ctrlPr>
-                        </m:sSubPr>
-                        <m:e>
-                          <m:r>
-                            <a:rPr lang="ar-AE" sz="1200" i="1" kern="1200">
-                              <a:solidFill>
-                                <a:schemeClr val="tx1"/>
-                              </a:solidFill>
-                              <a:latin typeface="Cambria Math" panose="02040503050406030204" pitchFamily="18" charset="0"/>
-                              <a:ea typeface="+mn-ea"/>
-                              <a:cs typeface="+mn-cs"/>
-                            </a:rPr>
-                            <m:t>𝑥</m:t>
-                          </m:r>
-                        </m:e>
-                        <m:sub>
-                          <m:r>
-                            <a:rPr lang="ar-AE" sz="1200" i="1" kern="1200">
-                              <a:solidFill>
-                                <a:schemeClr val="tx1"/>
-                              </a:solidFill>
-                              <a:latin typeface="Cambria Math" panose="02040503050406030204" pitchFamily="18" charset="0"/>
-                              <a:ea typeface="+mn-ea"/>
-                              <a:cs typeface="+mn-cs"/>
-                            </a:rPr>
-                            <m:t>𝑖</m:t>
-                          </m:r>
-                        </m:sub>
-                      </m:sSub>
-                      <m:r>
-                        <a:rPr lang="ar-AE" sz="1200" i="0" kern="1200">
-                          <a:solidFill>
-                            <a:schemeClr val="tx1"/>
-                          </a:solidFill>
-                          <a:latin typeface="Cambria Math" panose="02040503050406030204" pitchFamily="18" charset="0"/>
-                          <a:ea typeface="+mn-ea"/>
-                          <a:cs typeface="+mn-cs"/>
-                        </a:rPr>
-                        <m:t>∣</m:t>
-                      </m:r>
-                    </m:oMath>
-                  </m:oMathPara>
-                </a14:m>
-                <a:endParaRPr lang="en-US" dirty="0"/>
-              </a:p>
-              <a:p>
-                <a:endParaRPr lang="en-US" dirty="0"/>
-              </a:p>
-              <a:p>
-                <a:endParaRPr lang="en-US" dirty="0"/>
-              </a:p>
-              <a:p>
-                <a:endParaRPr lang="ar-AE" dirty="0"/>
-              </a:p>
               <a:p>
                 <a:endParaRPr lang="en-US" dirty="0"/>
               </a:p>
@@ -2846,7 +1523,7 @@
           <a:p>
             <a:fld id="{5BB8B00E-4663-0846-A915-0BA92983703F}" type="datetime1">
               <a:rPr lang="en-US" smtClean="0"/>
-              <a:t>5/4/26</a:t>
+              <a:t>8/13/26</a:t>
             </a:fld>
             <a:endParaRPr lang="en-US" dirty="0"/>
           </a:p>
@@ -3064,7 +1741,7 @@
           <a:p>
             <a:fld id="{CE263B5C-D9E0-C140-91C8-AD07FEAEF33B}" type="datetime1">
               <a:rPr lang="en-US" smtClean="0"/>
-              <a:t>5/4/26</a:t>
+              <a:t>8/13/26</a:t>
             </a:fld>
             <a:endParaRPr lang="en-US"/>
           </a:p>
@@ -3246,7 +1923,7 @@
           <a:p>
             <a:fld id="{94AB7315-4668-9F42-B6B5-477C7FEECFF8}" type="datetime1">
               <a:rPr lang="en-US" smtClean="0"/>
-              <a:t>5/4/26</a:t>
+              <a:t>8/13/26</a:t>
             </a:fld>
             <a:endParaRPr lang="en-US"/>
           </a:p>
@@ -3423,7 +2100,7 @@
           <a:p>
             <a:fld id="{268C1BDC-2F37-D34E-83BD-9834421E339C}" type="datetime1">
               <a:rPr lang="en-US" smtClean="0"/>
-              <a:t>5/4/26</a:t>
+              <a:t>8/13/26</a:t>
             </a:fld>
             <a:endParaRPr lang="en-US"/>
           </a:p>
@@ -3728,7 +2405,7 @@
           <a:p>
             <a:fld id="{7E837463-0958-6948-B062-80DD962DDD89}" type="datetime1">
               <a:rPr lang="en-US" smtClean="0"/>
-              <a:t>5/4/26</a:t>
+              <a:t>8/13/26</a:t>
             </a:fld>
             <a:endParaRPr lang="en-US"/>
           </a:p>
@@ -3961,7 +2638,7 @@
           <a:p>
             <a:fld id="{4D5C00E9-74D4-0748-9518-B67C9BFCB031}" type="datetime1">
               <a:rPr lang="en-US" smtClean="0"/>
-              <a:t>5/4/26</a:t>
+              <a:t>8/13/26</a:t>
             </a:fld>
             <a:endParaRPr lang="en-US"/>
           </a:p>
@@ -4329,7 +3006,7 @@
           <a:p>
             <a:fld id="{949420F8-C188-7343-8A63-4724A893274A}" type="datetime1">
               <a:rPr lang="en-US" smtClean="0"/>
-              <a:t>5/4/26</a:t>
+              <a:t>8/13/26</a:t>
             </a:fld>
             <a:endParaRPr lang="en-US"/>
           </a:p>
@@ -4450,7 +3127,7 @@
           <a:p>
             <a:fld id="{8B502A1E-F8A9-4241-B9E6-69CE16FF0049}" type="datetime1">
               <a:rPr lang="en-US" smtClean="0"/>
-              <a:t>5/4/26</a:t>
+              <a:t>8/13/26</a:t>
             </a:fld>
             <a:endParaRPr lang="en-US"/>
           </a:p>
@@ -4549,7 +3226,7 @@
           <a:p>
             <a:fld id="{B491CBCC-E13B-6040-87FF-78CC297F1595}" type="datetime1">
               <a:rPr lang="en-US" smtClean="0"/>
-              <a:t>5/4/26</a:t>
+              <a:t>8/13/26</a:t>
             </a:fld>
             <a:endParaRPr lang="en-US"/>
           </a:p>
@@ -4828,7 +3505,7 @@
           <a:p>
             <a:fld id="{FBA6EF64-B4ED-134E-9132-8D9E7630E3FA}" type="datetime1">
               <a:rPr lang="en-US" smtClean="0"/>
-              <a:t>5/4/26</a:t>
+              <a:t>8/13/26</a:t>
             </a:fld>
             <a:endParaRPr lang="en-US"/>
           </a:p>
@@ -5084,7 +3761,7 @@
           <a:p>
             <a:fld id="{C6AD2E05-8903-2742-B4BF-BE46B226D655}" type="datetime1">
               <a:rPr lang="en-US" smtClean="0"/>
-              <a:t>5/4/26</a:t>
+              <a:t>8/13/26</a:t>
             </a:fld>
             <a:endParaRPr lang="en-US"/>
           </a:p>
@@ -5299,7 +3976,7 @@
           <a:p>
             <a:fld id="{81351C21-B91D-8E4E-99B9-AF9387D7EB09}" type="datetime1">
               <a:rPr lang="en-US" smtClean="0"/>
-              <a:t>5/4/26</a:t>
+              <a:t>8/13/26</a:t>
             </a:fld>
             <a:endParaRPr lang="en-US"/>
           </a:p>
@@ -5889,7 +4566,7 @@
                     <m:sSub>
                       <m:sSubPr>
                         <m:ctrlPr>
-                          <a:rPr lang="en-US" i="1">
+                          <a:rPr lang="en-US" b="1">
                             <a:latin typeface="Cambria Math" panose="02040503050406030204" pitchFamily="18" charset="0"/>
                           </a:rPr>
                         </m:ctrlPr>
@@ -6009,7 +4686,7 @@
                     <m:sSub>
                       <m:sSubPr>
                         <m:ctrlPr>
-                          <a:rPr lang="en-US" i="1">
+                          <a:rPr lang="en-US" b="1">
                             <a:latin typeface="Cambria Math" panose="02040503050406030204" pitchFamily="18" charset="0"/>
                           </a:rPr>
                         </m:ctrlPr>
@@ -6156,7 +4833,7 @@
                     <m:sSub>
                       <m:sSubPr>
                         <m:ctrlPr>
-                          <a:rPr lang="en-US" i="1">
+                          <a:rPr lang="en-US" b="1">
                             <a:latin typeface="Cambria Math" panose="02040503050406030204" pitchFamily="18" charset="0"/>
                           </a:rPr>
                         </m:ctrlPr>
@@ -6205,7 +4882,7 @@
                     <m:sSub>
                       <m:sSubPr>
                         <m:ctrlPr>
-                          <a:rPr lang="en-US" i="1">
+                          <a:rPr lang="en-US" b="1">
                             <a:latin typeface="Cambria Math" panose="02040503050406030204" pitchFamily="18" charset="0"/>
                           </a:rPr>
                         </m:ctrlPr>
@@ -6318,7 +4995,7 @@
           <a:p>
             <a:fld id="{4B5FD7A4-B8F2-5C47-8ED4-E9F65C3395A0}" type="datetime1">
               <a:rPr lang="en-US" smtClean="0"/>
-              <a:t>5/4/26</a:t>
+              <a:t>8/13/26</a:t>
             </a:fld>
             <a:endParaRPr lang="en-US"/>
           </a:p>
@@ -6555,7 +5232,7 @@
                     <m:sSubSup>
                       <m:sSubSupPr>
                         <m:ctrlPr>
-                          <a:rPr lang="en-US" b="0" i="1" smtClean="0">
+                          <a:rPr lang="en-US" b="1" i="0" smtClean="0">
                             <a:latin typeface="Cambria Math" panose="02040503050406030204" pitchFamily="18" charset="0"/>
                           </a:rPr>
                         </m:ctrlPr>
@@ -6606,7 +5283,7 @@
                     <m:sSubSup>
                       <m:sSubSupPr>
                         <m:ctrlPr>
-                          <a:rPr lang="en-US" b="0" i="1" smtClean="0">
+                          <a:rPr lang="en-US" b="1">
                             <a:latin typeface="Cambria Math" panose="02040503050406030204" pitchFamily="18" charset="0"/>
                           </a:rPr>
                         </m:ctrlPr>
@@ -6745,10 +5422,7 @@
                 </a:pPr>
                 <a14:m>
                   <m:oMathPara xmlns:m="http://schemas.openxmlformats.org/officeDocument/2006/math">
-                    <m:oMathParaPr>
-                      <m:jc m:val="centerGroup"/>
-                    </m:oMathParaPr>
-                    <m:oMath xmlns:m="http://schemas.openxmlformats.org/officeDocument/2006/math">
+                    <m:oMath>
                       <m:r>
                         <a:rPr lang="en-US" b="1" i="0" smtClean="0">
                           <a:latin typeface="Cambria Math" panose="02040503050406030204" pitchFamily="18" charset="0"/>
@@ -6781,7 +5455,7 @@
                       <m:sSubSup>
                         <m:sSubSupPr>
                           <m:ctrlPr>
-                            <a:rPr lang="en-US" i="1">
+                            <a:rPr lang="en-US" b="1">
                               <a:latin typeface="Cambria Math" panose="02040503050406030204" pitchFamily="18" charset="0"/>
                             </a:rPr>
                           </m:ctrlPr>
@@ -6897,7 +5571,7 @@
                     <m:sSub>
                       <m:sSubPr>
                         <m:ctrlPr>
-                          <a:rPr lang="en-US" i="1">
+                          <a:rPr lang="en-US" b="1">
                             <a:latin typeface="Cambria Math" panose="02040503050406030204" pitchFamily="18" charset="0"/>
                           </a:rPr>
                         </m:ctrlPr>
@@ -7021,7 +5695,7 @@
                     <m:d>
                       <m:dPr>
                         <m:ctrlPr>
-                          <a:rPr lang="en-US" b="0" i="1" smtClean="0">
+                          <a:rPr lang="en-US" b="1" i="0" smtClean="0">
                             <a:latin typeface="Cambria Math" panose="02040503050406030204" pitchFamily="18" charset="0"/>
                           </a:rPr>
                         </m:ctrlPr>
@@ -7061,7 +5735,7 @@
                     <m:sSubSup>
                       <m:sSubSupPr>
                         <m:ctrlPr>
-                          <a:rPr lang="en-US" i="1">
+                          <a:rPr lang="en-US" b="1">
                             <a:latin typeface="Cambria Math" panose="02040503050406030204" pitchFamily="18" charset="0"/>
                           </a:rPr>
                         </m:ctrlPr>
@@ -7155,10 +5829,7 @@
                 </a:pPr>
                 <a14:m>
                   <m:oMathPara xmlns:m="http://schemas.openxmlformats.org/officeDocument/2006/math">
-                    <m:oMathParaPr>
-                      <m:jc m:val="centerGroup"/>
-                    </m:oMathParaPr>
-                    <m:oMath xmlns:m="http://schemas.openxmlformats.org/officeDocument/2006/math">
+                    <m:oMath>
                       <m:r>
                         <a:rPr lang="en-US" b="1">
                           <a:latin typeface="Cambria Math" panose="02040503050406030204" pitchFamily="18" charset="0"/>
@@ -7263,7 +5934,7 @@
                       <m:d>
                         <m:dPr>
                           <m:ctrlPr>
-                            <a:rPr lang="en-US" i="1">
+                            <a:rPr lang="en-US" b="1">
                               <a:latin typeface="Cambria Math" panose="02040503050406030204" pitchFamily="18" charset="0"/>
                             </a:rPr>
                           </m:ctrlPr>
@@ -7303,7 +5974,7 @@
                       <m:sSub>
                         <m:sSubPr>
                           <m:ctrlPr>
-                            <a:rPr lang="en-US" b="0" i="1" smtClean="0">
+                            <a:rPr lang="en-US" b="1" i="0" smtClean="0">
                               <a:latin typeface="Cambria Math" panose="02040503050406030204" pitchFamily="18" charset="0"/>
                             </a:rPr>
                           </m:ctrlPr>
@@ -7343,7 +6014,7 @@
                       <m:d>
                         <m:dPr>
                           <m:ctrlPr>
-                            <a:rPr lang="en-US" b="1" i="1">
+                            <a:rPr lang="en-US" i="1">
                               <a:latin typeface="Cambria Math" panose="02040503050406030204" pitchFamily="18" charset="0"/>
                             </a:rPr>
                           </m:ctrlPr>
@@ -7497,7 +6168,7 @@
           <a:p>
             <a:fld id="{B23018A4-8B3E-2C4A-9CDD-1807CBE6D7EA}" type="datetime1">
               <a:rPr lang="en-US" smtClean="0"/>
-              <a:t>5/4/26</a:t>
+              <a:t>8/13/26</a:t>
             </a:fld>
             <a:endParaRPr lang="en-US"/>
           </a:p>
@@ -7768,7 +6439,7 @@
                     <m:d>
                       <m:dPr>
                         <m:ctrlPr>
-                          <a:rPr lang="en-US" b="0" i="1" smtClean="0">
+                          <a:rPr lang="en-US" b="1" i="0" smtClean="0">
                             <a:latin typeface="Cambria Math" panose="02040503050406030204" pitchFamily="18" charset="0"/>
                           </a:rPr>
                         </m:ctrlPr>
@@ -7808,7 +6479,7 @@
                     <m:sSubSup>
                       <m:sSubSupPr>
                         <m:ctrlPr>
-                          <a:rPr lang="en-US" b="0" i="1" smtClean="0">
+                          <a:rPr lang="en-US" b="1">
                             <a:latin typeface="Cambria Math" panose="02040503050406030204" pitchFamily="18" charset="0"/>
                           </a:rPr>
                         </m:ctrlPr>
@@ -7847,7 +6518,7 @@
                     <m:sSubSup>
                       <m:sSubSupPr>
                         <m:ctrlPr>
-                          <a:rPr lang="en-US" b="0" i="1" smtClean="0">
+                          <a:rPr lang="en-US" b="1">
                             <a:latin typeface="Cambria Math" panose="02040503050406030204" pitchFamily="18" charset="0"/>
                           </a:rPr>
                         </m:ctrlPr>
@@ -8146,7 +6817,7 @@
                     <m:oMathParaPr>
                       <m:jc m:val="center"/>
                     </m:oMathParaPr>
-                    <m:oMath xmlns:m="http://schemas.openxmlformats.org/officeDocument/2006/math">
+                    <m:oMath>
                       <m:sSubSup>
                         <m:sSubSupPr>
                           <m:ctrlPr>
@@ -8183,7 +6854,7 @@
                       <m:d>
                         <m:dPr>
                           <m:ctrlPr>
-                            <a:rPr lang="en-US" sz="2400" i="1" smtClean="0">
+                            <a:rPr lang="en-US" sz="2400" b="1" i="0" smtClean="0">
                               <a:latin typeface="Cambria Math" panose="02040503050406030204" pitchFamily="18" charset="0"/>
                             </a:rPr>
                           </m:ctrlPr>
@@ -8232,7 +6903,7 @@
                           <m:limLow>
                             <m:limLowPr>
                               <m:ctrlPr>
-                                <a:rPr lang="en-US" sz="2400" i="1" smtClean="0">
+                                <a:rPr lang="en-US" sz="2400" smtClean="0">
                                   <a:latin typeface="Cambria Math" panose="02040503050406030204" pitchFamily="18" charset="0"/>
                                 </a:rPr>
                               </m:ctrlPr>
@@ -8252,7 +6923,7 @@
                               <m:sSub>
                                 <m:sSubPr>
                                   <m:ctrlPr>
-                                    <a:rPr lang="en-US" sz="2400" b="0" i="1" smtClean="0">
+                                    <a:rPr lang="en-US" sz="2400" b="1" i="0" smtClean="0">
                                       <a:latin typeface="Cambria Math" panose="02040503050406030204" pitchFamily="18" charset="0"/>
                                     </a:rPr>
                                   </m:ctrlPr>
@@ -8283,7 +6954,7 @@
                               <m:sSub>
                                 <m:sSubPr>
                                   <m:ctrlPr>
-                                    <a:rPr lang="en-US" sz="2400" i="1">
+                                    <a:rPr lang="en-US" sz="2400" b="1">
                                       <a:latin typeface="Cambria Math" panose="02040503050406030204" pitchFamily="18" charset="0"/>
                                     </a:rPr>
                                   </m:ctrlPr>
@@ -8333,7 +7004,7 @@
                               <m:sSub>
                                 <m:sSubPr>
                                   <m:ctrlPr>
-                                    <a:rPr lang="en-US" sz="2400" i="1" smtClean="0">
+                                    <a:rPr lang="en-US" sz="2400" b="1" smtClean="0">
                                       <a:latin typeface="Cambria Math" panose="02040503050406030204" pitchFamily="18" charset="0"/>
                                     </a:rPr>
                                   </m:ctrlPr>
@@ -8369,7 +7040,7 @@
                         <m:naryPr>
                           <m:chr m:val="∑"/>
                           <m:ctrlPr>
-                            <a:rPr lang="en-US" sz="2400" i="1">
+                            <a:rPr lang="en-US" sz="2400" i="1" smtClean="0">
                               <a:latin typeface="Cambria Math" panose="02040503050406030204" pitchFamily="18" charset="0"/>
                             </a:rPr>
                           </m:ctrlPr>
@@ -8421,7 +7092,7 @@
                           <m:sSub>
                             <m:sSubPr>
                               <m:ctrlPr>
-                                <a:rPr lang="en-US" sz="2400" i="1" smtClean="0">
+                                <a:rPr lang="en-US" sz="2400" b="1" smtClean="0">
                                   <a:latin typeface="Cambria Math" panose="02040503050406030204" pitchFamily="18" charset="0"/>
                                 </a:rPr>
                               </m:ctrlPr>
@@ -8452,7 +7123,7 @@
                           <m:sSub>
                             <m:sSubPr>
                               <m:ctrlPr>
-                                <a:rPr lang="en-US" sz="2400" i="1" smtClean="0">
+                                <a:rPr lang="en-US" sz="2400" b="1" smtClean="0">
                                   <a:latin typeface="Cambria Math" panose="02040503050406030204" pitchFamily="18" charset="0"/>
                                 </a:rPr>
                               </m:ctrlPr>
@@ -8580,7 +7251,7 @@
                     <m:sSub>
                       <m:sSubPr>
                         <m:ctrlPr>
-                          <a:rPr lang="en-US" sz="2400" i="1">
+                          <a:rPr lang="en-US" sz="2400" b="1" i="0" smtClean="0">
                             <a:latin typeface="Cambria Math" panose="02040503050406030204" pitchFamily="18" charset="0"/>
                           </a:rPr>
                         </m:ctrlPr>
@@ -8629,7 +7300,7 @@
                     <m:sSub>
                       <m:sSubPr>
                         <m:ctrlPr>
-                          <a:rPr lang="en-US" sz="2400" i="1">
+                          <a:rPr lang="en-US" sz="2400" b="1">
                             <a:latin typeface="Cambria Math" panose="02040503050406030204" pitchFamily="18" charset="0"/>
                           </a:rPr>
                         </m:ctrlPr>
@@ -8666,7 +7337,7 @@
                     <m:sSub>
                       <m:sSubPr>
                         <m:ctrlPr>
-                          <a:rPr lang="en-US" sz="2400" i="1">
+                          <a:rPr lang="en-US" sz="2400" b="1" i="0" smtClean="0">
                             <a:latin typeface="Cambria Math" panose="02040503050406030204" pitchFamily="18" charset="0"/>
                           </a:rPr>
                         </m:ctrlPr>
@@ -8812,7 +7483,7 @@
                     <m:sSub>
                       <m:sSubPr>
                         <m:ctrlPr>
-                          <a:rPr lang="en-US" sz="2400" i="1">
+                          <a:rPr lang="en-US" sz="2400" b="1" i="0" smtClean="0">
                             <a:latin typeface="Cambria Math" panose="02040503050406030204" pitchFamily="18" charset="0"/>
                           </a:rPr>
                         </m:ctrlPr>
@@ -8861,7 +7532,7 @@
                     <m:sSub>
                       <m:sSubPr>
                         <m:ctrlPr>
-                          <a:rPr lang="en-US" sz="2400" i="1">
+                          <a:rPr lang="en-US" sz="2400" b="1" i="0" smtClean="0">
                             <a:latin typeface="Cambria Math" panose="02040503050406030204" pitchFamily="18" charset="0"/>
                           </a:rPr>
                         </m:ctrlPr>
@@ -9022,7 +7693,7 @@
                     <m:sSub>
                       <m:sSubPr>
                         <m:ctrlPr>
-                          <a:rPr lang="en-US" sz="2400" i="1">
+                          <a:rPr lang="en-US" sz="2400" b="1" i="0" smtClean="0">
                             <a:latin typeface="Cambria Math" panose="02040503050406030204" pitchFamily="18" charset="0"/>
                           </a:rPr>
                         </m:ctrlPr>
@@ -9172,7 +7843,7 @@
                     <m:sSub>
                       <m:sSubPr>
                         <m:ctrlPr>
-                          <a:rPr lang="en-US" sz="2400" i="1">
+                          <a:rPr lang="en-US" sz="2400" b="1" i="0" smtClean="0">
                             <a:latin typeface="Cambria Math" panose="02040503050406030204" pitchFamily="18" charset="0"/>
                           </a:rPr>
                         </m:ctrlPr>
@@ -9305,7 +7976,7 @@
           <a:p>
             <a:fld id="{1D50959A-DA80-244C-A29E-8D6E33E27CC1}" type="datetime1">
               <a:rPr lang="en-US" smtClean="0"/>
-              <a:t>5/4/26</a:t>
+              <a:t>8/13/26</a:t>
             </a:fld>
             <a:endParaRPr lang="en-US"/>
           </a:p>
@@ -9467,7 +8138,7 @@
                     <m:oMathParaPr>
                       <m:jc m:val="center"/>
                     </m:oMathParaPr>
-                    <m:oMath xmlns:m="http://schemas.openxmlformats.org/officeDocument/2006/math">
+                    <m:oMath>
                       <m:r>
                         <a:rPr lang="en-US" b="1">
                           <a:latin typeface="Cambria Math" panose="02040503050406030204" pitchFamily="18" charset="0"/>
@@ -9500,7 +8171,7 @@
                       <m:sSubSup>
                         <m:sSubSupPr>
                           <m:ctrlPr>
-                            <a:rPr lang="en-US" i="1">
+                            <a:rPr lang="en-US" b="1">
                               <a:latin typeface="Cambria Math" panose="02040503050406030204" pitchFamily="18" charset="0"/>
                             </a:rPr>
                           </m:ctrlPr>
@@ -9533,7 +8204,7 @@
                       <m:d>
                         <m:dPr>
                           <m:ctrlPr>
-                            <a:rPr lang="en-US" i="1">
+                            <a:rPr lang="en-US" b="1">
                               <a:latin typeface="Cambria Math" panose="02040503050406030204" pitchFamily="18" charset="0"/>
                             </a:rPr>
                           </m:ctrlPr>
@@ -9548,7 +8219,7 @@
                           <m:d>
                             <m:dPr>
                               <m:ctrlPr>
-                                <a:rPr lang="en-US" b="1" i="1">
+                                <a:rPr lang="en-US" i="1">
                                   <a:latin typeface="Cambria Math" panose="02040503050406030204" pitchFamily="18" charset="0"/>
                                 </a:rPr>
                               </m:ctrlPr>
@@ -9632,10 +8303,7 @@
                 </a:pPr>
                 <a14:m>
                   <m:oMathPara xmlns:m="http://schemas.openxmlformats.org/officeDocument/2006/math">
-                    <m:oMathParaPr>
-                      <m:jc m:val="centerGroup"/>
-                    </m:oMathParaPr>
-                    <m:oMath xmlns:m="http://schemas.openxmlformats.org/officeDocument/2006/math">
+                    <m:oMath>
                       <m:r>
                         <a:rPr lang="en-US" b="1">
                           <a:latin typeface="Cambria Math" panose="02040503050406030204" pitchFamily="18" charset="0"/>
@@ -9721,7 +8389,7 @@
                       <m:d>
                         <m:dPr>
                           <m:ctrlPr>
-                            <a:rPr lang="en-US" i="1">
+                            <a:rPr lang="en-US" b="1">
                               <a:latin typeface="Cambria Math" panose="02040503050406030204" pitchFamily="18" charset="0"/>
                             </a:rPr>
                           </m:ctrlPr>
@@ -9761,7 +8429,7 @@
                       <m:sSub>
                         <m:sSubPr>
                           <m:ctrlPr>
-                            <a:rPr lang="en-US" i="1">
+                            <a:rPr lang="en-US" b="1" i="0">
                               <a:latin typeface="Cambria Math" panose="02040503050406030204" pitchFamily="18" charset="0"/>
                             </a:rPr>
                           </m:ctrlPr>
@@ -9801,7 +8469,7 @@
                       <m:d>
                         <m:dPr>
                           <m:ctrlPr>
-                            <a:rPr lang="en-US" b="1" i="1">
+                            <a:rPr lang="en-US" i="1">
                               <a:latin typeface="Cambria Math" panose="02040503050406030204" pitchFamily="18" charset="0"/>
                             </a:rPr>
                           </m:ctrlPr>
@@ -9904,7 +8572,7 @@
           <a:p>
             <a:fld id="{C9F43EB7-A0B9-B648-BC9D-3B48298B27EC}" type="datetime1">
               <a:rPr lang="en-US" smtClean="0"/>
-              <a:t>5/4/26</a:t>
+              <a:t>8/13/26</a:t>
             </a:fld>
             <a:endParaRPr lang="en-US"/>
           </a:p>
@@ -10081,7 +8749,7 @@
                         <m:sSub>
                           <m:sSubPr>
                             <m:ctrlPr>
-                              <a:rPr lang="en-US" b="0" i="1" smtClean="0">
+                              <a:rPr lang="en-US" b="1" i="0" smtClean="0">
                                 <a:latin typeface="Cambria Math" panose="02040503050406030204" pitchFamily="18" charset="0"/>
                               </a:rPr>
                             </m:ctrlPr>
@@ -10114,7 +8782,7 @@
                     <m:sSubSup>
                       <m:sSubSupPr>
                         <m:ctrlPr>
-                          <a:rPr lang="en-US" b="0" i="1" smtClean="0">
+                          <a:rPr lang="en-US" b="1">
                             <a:latin typeface="Cambria Math" panose="02040503050406030204" pitchFamily="18" charset="0"/>
                           </a:rPr>
                         </m:ctrlPr>
@@ -10156,7 +8824,7 @@
                     <m:sSub>
                       <m:sSubPr>
                         <m:ctrlPr>
-                          <a:rPr lang="en-US" i="1">
+                          <a:rPr lang="en-US" b="1">
                             <a:latin typeface="Cambria Math" panose="02040503050406030204" pitchFamily="18" charset="0"/>
                           </a:rPr>
                         </m:ctrlPr>
@@ -10202,7 +8870,7 @@
                         <m:sSub>
                           <m:sSubPr>
                             <m:ctrlPr>
-                              <a:rPr lang="en-US" b="0" i="1" smtClean="0">
+                              <a:rPr lang="en-US" b="1" i="0" smtClean="0">
                                 <a:latin typeface="Cambria Math" panose="02040503050406030204" pitchFamily="18" charset="0"/>
                               </a:rPr>
                             </m:ctrlPr>
@@ -10233,7 +8901,7 @@
                         <m:sSub>
                           <m:sSubPr>
                             <m:ctrlPr>
-                              <a:rPr lang="en-US" b="0" i="1" smtClean="0">
+                              <a:rPr lang="en-US" b="1" i="0" smtClean="0">
                                 <a:latin typeface="Cambria Math" panose="02040503050406030204" pitchFamily="18" charset="0"/>
                               </a:rPr>
                             </m:ctrlPr>
@@ -10266,7 +8934,7 @@
                     <m:sSubSup>
                       <m:sSubSupPr>
                         <m:ctrlPr>
-                          <a:rPr lang="en-US" i="1">
+                          <a:rPr lang="en-US" b="1">
                             <a:latin typeface="Cambria Math" panose="02040503050406030204" pitchFamily="18" charset="0"/>
                           </a:rPr>
                         </m:ctrlPr>
@@ -10308,7 +8976,7 @@
                     <m:sSub>
                       <m:sSubPr>
                         <m:ctrlPr>
-                          <a:rPr lang="en-US" i="1">
+                          <a:rPr lang="en-US" b="1">
                             <a:latin typeface="Cambria Math" panose="02040503050406030204" pitchFamily="18" charset="0"/>
                           </a:rPr>
                         </m:ctrlPr>
@@ -10344,7 +9012,7 @@
                     <m:sSubSup>
                       <m:sSubSupPr>
                         <m:ctrlPr>
-                          <a:rPr lang="en-US" i="1">
+                          <a:rPr lang="en-US" b="1" i="0" smtClean="0">
                             <a:latin typeface="Cambria Math" panose="02040503050406030204" pitchFamily="18" charset="0"/>
                           </a:rPr>
                         </m:ctrlPr>
@@ -10386,7 +9054,7 @@
                     <m:sSub>
                       <m:sSubPr>
                         <m:ctrlPr>
-                          <a:rPr lang="en-US" i="1">
+                          <a:rPr lang="en-US" b="1" i="0" smtClean="0">
                             <a:latin typeface="Cambria Math" panose="02040503050406030204" pitchFamily="18" charset="0"/>
                           </a:rPr>
                         </m:ctrlPr>
@@ -10537,7 +9205,7 @@
                         <m:sSub>
                           <m:sSubPr>
                             <m:ctrlPr>
-                              <a:rPr lang="en-US" i="1">
+                              <a:rPr lang="en-US" b="1">
                                 <a:latin typeface="Cambria Math" panose="02040503050406030204" pitchFamily="18" charset="0"/>
                               </a:rPr>
                             </m:ctrlPr>
@@ -10570,7 +9238,7 @@
                     <m:sSub>
                       <m:sSubPr>
                         <m:ctrlPr>
-                          <a:rPr lang="en-US" b="0" i="1" smtClean="0">
+                          <a:rPr lang="en-US" i="1">
                             <a:latin typeface="Cambria Math" panose="02040503050406030204" pitchFamily="18" charset="0"/>
                           </a:rPr>
                         </m:ctrlPr>
@@ -10596,7 +9264,7 @@
                             <m:sSub>
                               <m:sSubPr>
                                 <m:ctrlPr>
-                                  <a:rPr lang="en-US" i="1">
+                                  <a:rPr lang="en-US" b="1">
                                     <a:latin typeface="Cambria Math" panose="02040503050406030204" pitchFamily="18" charset="0"/>
                                   </a:rPr>
                                 </m:ctrlPr>
@@ -10654,7 +9322,7 @@
                         <m:sSub>
                           <m:sSubPr>
                             <m:ctrlPr>
-                              <a:rPr lang="en-US" i="1">
+                              <a:rPr lang="en-US" b="1">
                                 <a:latin typeface="Cambria Math" panose="02040503050406030204" pitchFamily="18" charset="0"/>
                               </a:rPr>
                             </m:ctrlPr>
@@ -10685,7 +9353,7 @@
                         <m:sSub>
                           <m:sSubPr>
                             <m:ctrlPr>
-                              <a:rPr lang="en-US" i="1">
+                              <a:rPr lang="en-US" b="1">
                                 <a:latin typeface="Cambria Math" panose="02040503050406030204" pitchFamily="18" charset="0"/>
                               </a:rPr>
                             </m:ctrlPr>
@@ -10718,7 +9386,7 @@
                     <m:sSub>
                       <m:sSubPr>
                         <m:ctrlPr>
-                          <a:rPr lang="en-US" b="0" i="1" smtClean="0">
+                          <a:rPr lang="en-US" i="1">
                             <a:latin typeface="Cambria Math" panose="02040503050406030204" pitchFamily="18" charset="0"/>
                           </a:rPr>
                         </m:ctrlPr>
@@ -10744,7 +9412,7 @@
                             <m:sSub>
                               <m:sSubPr>
                                 <m:ctrlPr>
-                                  <a:rPr lang="en-US" i="1">
+                                  <a:rPr lang="en-US" b="1">
                                     <a:latin typeface="Cambria Math" panose="02040503050406030204" pitchFamily="18" charset="0"/>
                                   </a:rPr>
                                 </m:ctrlPr>
@@ -10803,7 +9471,7 @@
                             <m:begChr m:val="‖"/>
                             <m:endChr m:val="‖"/>
                             <m:ctrlPr>
-                              <a:rPr lang="en-US" i="1">
+                              <a:rPr lang="en-US" b="0" i="1" smtClean="0">
                                 <a:latin typeface="Cambria Math" panose="02040503050406030204" pitchFamily="18" charset="0"/>
                               </a:rPr>
                             </m:ctrlPr>
@@ -10818,7 +9486,7 @@
                             <m:sSub>
                               <m:sSubPr>
                                 <m:ctrlPr>
-                                  <a:rPr lang="en-US" i="1">
+                                  <a:rPr lang="en-US" b="1" i="0" smtClean="0">
                                     <a:latin typeface="Cambria Math" panose="02040503050406030204" pitchFamily="18" charset="0"/>
                                   </a:rPr>
                                 </m:ctrlPr>
@@ -11024,7 +9692,7 @@
           <a:p>
             <a:fld id="{D5CE4D3F-6577-1A42-A023-9365E18C6592}" type="datetime1">
               <a:rPr lang="en-US" smtClean="0"/>
-              <a:t>5/4/26</a:t>
+              <a:t>8/13/26</a:t>
             </a:fld>
             <a:endParaRPr lang="en-US"/>
           </a:p>
@@ -11459,7 +10127,7 @@
                     <m:sSubSup>
                       <m:sSubSupPr>
                         <m:ctrlPr>
-                          <a:rPr lang="en-US" i="1">
+                          <a:rPr lang="en-US" b="0" i="1" smtClean="0">
                             <a:latin typeface="Cambria Math" panose="02040503050406030204" pitchFamily="18" charset="0"/>
                           </a:rPr>
                         </m:ctrlPr>
@@ -11498,7 +10166,7 @@
                     <m:d>
                       <m:dPr>
                         <m:ctrlPr>
-                          <a:rPr lang="en-US" i="1">
+                          <a:rPr lang="en-US" b="1">
                             <a:latin typeface="Cambria Math" panose="02040503050406030204" pitchFamily="18" charset="0"/>
                           </a:rPr>
                         </m:ctrlPr>
@@ -11592,7 +10260,7 @@
                     <m:d>
                       <m:dPr>
                         <m:ctrlPr>
-                          <a:rPr lang="en-US" i="1">
+                          <a:rPr lang="en-US" b="1">
                             <a:latin typeface="Cambria Math" panose="02040503050406030204" pitchFamily="18" charset="0"/>
                           </a:rPr>
                         </m:ctrlPr>
@@ -11682,7 +10350,7 @@
                     <m:sSubSup>
                       <m:sSubSupPr>
                         <m:ctrlPr>
-                          <a:rPr lang="en-US" b="0" i="1" smtClean="0">
+                          <a:rPr lang="en-US" b="1" i="0" smtClean="0">
                             <a:latin typeface="Cambria Math" panose="02040503050406030204" pitchFamily="18" charset="0"/>
                           </a:rPr>
                         </m:ctrlPr>
@@ -11759,7 +10427,7 @@
                     <m:d>
                       <m:dPr>
                         <m:ctrlPr>
-                          <a:rPr lang="en-US" i="1">
+                          <a:rPr lang="en-US" b="1">
                             <a:latin typeface="Cambria Math" panose="02040503050406030204" pitchFamily="18" charset="0"/>
                           </a:rPr>
                         </m:ctrlPr>
@@ -11946,7 +10614,7 @@
           <a:p>
             <a:fld id="{7F540BDD-F9E2-654A-8895-A24D774047C2}" type="datetime1">
               <a:rPr lang="en-US" smtClean="0"/>
-              <a:t>5/4/26</a:t>
+              <a:t>8/13/26</a:t>
             </a:fld>
             <a:endParaRPr lang="en-US"/>
           </a:p>
@@ -12271,7 +10939,7 @@
           <a:p>
             <a:fld id="{95AFB11B-AC04-A945-8470-348790B69F4D}" type="datetime1">
               <a:rPr lang="en-US" smtClean="0"/>
-              <a:t>5/4/26</a:t>
+              <a:t>8/13/26</a:t>
             </a:fld>
             <a:endParaRPr lang="en-US"/>
           </a:p>
@@ -12595,7 +11263,7 @@
           <a:p>
             <a:fld id="{F4A40663-89C3-C543-ACFF-D941DD5FAB1C}" type="datetime1">
               <a:rPr lang="en-US" smtClean="0"/>
-              <a:t>5/4/26</a:t>
+              <a:t>8/13/26</a:t>
             </a:fld>
             <a:endParaRPr lang="en-US"/>
           </a:p>
@@ -12822,7 +11490,7 @@
           <a:p>
             <a:fld id="{D5B4E448-DD1F-0547-AFA3-49DC9D41F581}" type="datetime1">
               <a:rPr lang="en-US" smtClean="0"/>
-              <a:t>5/4/26</a:t>
+              <a:t>8/13/26</a:t>
             </a:fld>
             <a:endParaRPr lang="en-US"/>
           </a:p>
@@ -12998,7 +11666,7 @@
                     <m:oMathParaPr>
                       <m:jc m:val="center"/>
                     </m:oMathParaPr>
-                    <m:oMath xmlns:m="http://schemas.openxmlformats.org/officeDocument/2006/math">
+                    <m:oMath>
                       <m:sSub>
                         <m:sSubPr>
                           <m:ctrlPr>
@@ -13035,7 +11703,7 @@
                           <m:begChr m:val="{"/>
                           <m:endChr m:val="|"/>
                           <m:ctrlPr>
-                            <a:rPr lang="en-US" sz="2400" b="0" i="1" smtClean="0">
+                            <a:rPr lang="en-US" sz="2400" b="1" i="1" smtClean="0">
                               <a:latin typeface="Cambria Math" panose="02040503050406030204" pitchFamily="18" charset="0"/>
                             </a:rPr>
                           </m:ctrlPr>
@@ -13044,7 +11712,7 @@
                           <m:sSub>
                             <m:sSubPr>
                               <m:ctrlPr>
-                                <a:rPr lang="en-US" sz="2400" b="1" i="1" smtClean="0">
+                                <a:rPr lang="en-US" sz="2400" b="1" i="0" smtClean="0">
                                   <a:latin typeface="Cambria Math" panose="02040503050406030204" pitchFamily="18" charset="0"/>
                                 </a:rPr>
                               </m:ctrlPr>
@@ -13112,7 +11780,7 @@
                           <m:sSub>
                             <m:sSubPr>
                               <m:ctrlPr>
-                                <a:rPr lang="en-US" sz="2400" b="0" i="1" smtClean="0">
+                                <a:rPr lang="en-US" sz="2400" b="1" i="0" smtClean="0">
                                   <a:latin typeface="Cambria Math" panose="02040503050406030204" pitchFamily="18" charset="0"/>
                                   <a:ea typeface="Cambria Math" panose="02040503050406030204" pitchFamily="18" charset="0"/>
                                 </a:rPr>
@@ -13147,7 +11815,7 @@
                           <m:sSub>
                             <m:sSubPr>
                               <m:ctrlPr>
-                                <a:rPr lang="en-US" sz="2400" b="0" i="1" smtClean="0">
+                                <a:rPr lang="en-US" sz="2400" b="1" i="0" smtClean="0">
                                   <a:latin typeface="Cambria Math" panose="02040503050406030204" pitchFamily="18" charset="0"/>
                                   <a:ea typeface="Cambria Math" panose="02040503050406030204" pitchFamily="18" charset="0"/>
                                 </a:rPr>
@@ -13225,7 +11893,7 @@
                       <m:sSub>
                         <m:sSubPr>
                           <m:ctrlPr>
-                            <a:rPr lang="en-US" sz="2400" b="0" i="1" smtClean="0">
+                            <a:rPr lang="en-US" sz="2400" b="1" i="0" smtClean="0">
                               <a:latin typeface="Cambria Math" panose="02040503050406030204" pitchFamily="18" charset="0"/>
                               <a:ea typeface="Cambria Math" panose="02040503050406030204" pitchFamily="18" charset="0"/>
                             </a:rPr>
@@ -13274,7 +11942,7 @@
                       <m:sSub>
                         <m:sSubPr>
                           <m:ctrlPr>
-                            <a:rPr lang="en-US" sz="2400" b="0" i="1" smtClean="0">
+                            <a:rPr lang="en-US" sz="2400" b="1" i="0" smtClean="0">
                               <a:latin typeface="Cambria Math" panose="02040503050406030204" pitchFamily="18" charset="0"/>
                               <a:ea typeface="Cambria Math" panose="02040503050406030204" pitchFamily="18" charset="0"/>
                             </a:rPr>
@@ -13365,11 +12033,11 @@
                     <m:oMathParaPr>
                       <m:jc m:val="center"/>
                     </m:oMathParaPr>
-                    <m:oMath xmlns:m="http://schemas.openxmlformats.org/officeDocument/2006/math">
+                    <m:oMath>
                       <m:sSub>
                         <m:sSubPr>
                           <m:ctrlPr>
-                            <a:rPr lang="en-US" sz="2400" b="0" i="1" smtClean="0">
+                            <a:rPr lang="en-US" sz="2400" b="1" i="0" smtClean="0">
                               <a:latin typeface="Cambria Math" panose="02040503050406030204" pitchFamily="18" charset="0"/>
                               <a:ea typeface="Cambria Math" panose="02040503050406030204" pitchFamily="18" charset="0"/>
                             </a:rPr>
@@ -13456,7 +12124,7 @@
                       <m:sSub>
                         <m:sSubPr>
                           <m:ctrlPr>
-                            <a:rPr lang="en-US" sz="2400" b="0" i="1" smtClean="0">
+                            <a:rPr lang="en-US" sz="2400" b="1" i="0" smtClean="0">
                               <a:latin typeface="Cambria Math" panose="02040503050406030204" pitchFamily="18" charset="0"/>
                               <a:ea typeface="Cambria Math" panose="02040503050406030204" pitchFamily="18" charset="0"/>
                             </a:rPr>
@@ -13505,7 +12173,7 @@
                       <m:sSub>
                         <m:sSubPr>
                           <m:ctrlPr>
-                            <a:rPr lang="en-US" sz="2400" b="0" i="1" smtClean="0">
+                            <a:rPr lang="en-US" sz="2400" b="1" i="0" smtClean="0">
                               <a:latin typeface="Cambria Math" panose="02040503050406030204" pitchFamily="18" charset="0"/>
                               <a:ea typeface="Cambria Math" panose="02040503050406030204" pitchFamily="18" charset="0"/>
                             </a:rPr>
@@ -13547,7 +12215,7 @@
                       <m:sSub>
                         <m:sSubPr>
                           <m:ctrlPr>
-                            <a:rPr lang="en-US" sz="2400" b="0" i="1" smtClean="0">
+                            <a:rPr lang="en-US" sz="2400" b="1" i="0" smtClean="0">
                               <a:latin typeface="Cambria Math" panose="02040503050406030204" pitchFamily="18" charset="0"/>
                               <a:ea typeface="Cambria Math" panose="02040503050406030204" pitchFamily="18" charset="0"/>
                             </a:rPr>
@@ -13658,7 +12326,7 @@
                     <m:sSub>
                       <m:sSubPr>
                         <m:ctrlPr>
-                          <a:rPr lang="en-US" i="1" smtClean="0">
+                          <a:rPr lang="en-US" b="0" i="1" smtClean="0">
                             <a:latin typeface="Cambria Math" panose="02040503050406030204" pitchFamily="18" charset="0"/>
                           </a:rPr>
                         </m:ctrlPr>
@@ -13760,7 +12428,7 @@
           <a:p>
             <a:fld id="{61EE26DF-4012-514C-B68A-D5E8021A6914}" type="datetime1">
               <a:rPr lang="en-US" smtClean="0"/>
-              <a:t>5/4/26</a:t>
+              <a:t>8/13/26</a:t>
             </a:fld>
             <a:endParaRPr lang="en-US"/>
           </a:p>
@@ -16389,7 +15057,7 @@
           <a:p>
             <a:fld id="{461310BA-10FB-C24C-B315-34201EB90DE0}" type="datetime1">
               <a:rPr lang="en-US" smtClean="0"/>
-              <a:t>5/4/26</a:t>
+              <a:t>8/13/26</a:t>
             </a:fld>
             <a:endParaRPr lang="en-US"/>
           </a:p>
@@ -16641,7 +15309,7 @@
                     <m:d>
                       <m:dPr>
                         <m:ctrlPr>
-                          <a:rPr lang="en-US" b="1" i="1" dirty="0" smtClean="0">
+                          <a:rPr lang="en-US" i="1" dirty="0" smtClean="0">
                             <a:latin typeface="Cambria Math" panose="02040503050406030204" pitchFamily="18" charset="0"/>
                           </a:rPr>
                         </m:ctrlPr>
@@ -16682,7 +15350,7 @@
                     <m:d>
                       <m:dPr>
                         <m:ctrlPr>
-                          <a:rPr lang="en-US" b="1" i="1" dirty="0" smtClean="0">
+                          <a:rPr lang="en-US" i="1" dirty="0" smtClean="0">
                             <a:latin typeface="Cambria Math" panose="02040503050406030204" pitchFamily="18" charset="0"/>
                           </a:rPr>
                         </m:ctrlPr>
@@ -16756,7 +15424,7 @@
                     <m:oMathParaPr>
                       <m:jc m:val="center"/>
                     </m:oMathParaPr>
-                    <m:oMath xmlns:m="http://schemas.openxmlformats.org/officeDocument/2006/math">
+                    <m:oMath>
                       <m:r>
                         <m:rPr>
                           <m:sty m:val="p"/>
@@ -16846,7 +15514,7 @@
                       <m:d>
                         <m:dPr>
                           <m:ctrlPr>
-                            <a:rPr lang="en-US" b="0" i="1" smtClean="0">
+                            <a:rPr lang="en-US" b="1" i="0" smtClean="0">
                               <a:latin typeface="Cambria Math" panose="02040503050406030204" pitchFamily="18" charset="0"/>
                               <a:ea typeface="Cambria Math" panose="02040503050406030204" pitchFamily="18" charset="0"/>
                             </a:rPr>
@@ -16953,7 +15621,7 @@
                     <m:d>
                       <m:dPr>
                         <m:ctrlPr>
-                          <a:rPr lang="en-US" i="1">
+                          <a:rPr lang="en-US" b="1">
                             <a:latin typeface="Cambria Math" panose="02040503050406030204" pitchFamily="18" charset="0"/>
                           </a:rPr>
                         </m:ctrlPr>
@@ -16968,7 +15636,7 @@
                         <m:d>
                           <m:dPr>
                             <m:ctrlPr>
-                              <a:rPr lang="en-US" b="1" i="1">
+                              <a:rPr lang="en-US" i="1">
                                 <a:latin typeface="Cambria Math" panose="02040503050406030204" pitchFamily="18" charset="0"/>
                               </a:rPr>
                             </m:ctrlPr>
@@ -17027,41 +15695,11 @@
                       <m:rPr>
                         <m:nor/>
                       </m:rPr>
-                      <a:rPr lang="en-US" dirty="0">
+                      <a:rPr lang="en-US" i="0" dirty="0">
                         <a:latin typeface="Source Sans Pro" panose="020B0503030403020204" pitchFamily="34" charset="0"/>
                         <a:ea typeface="Source Sans Pro" panose="020B0503030403020204" pitchFamily="34" charset="0"/>
                       </a:rPr>
-                      <m:t>with</m:t>
-                    </m:r>
-                    <m:r>
-                      <m:rPr>
-                        <m:nor/>
-                      </m:rPr>
-                      <a:rPr lang="en-US" dirty="0">
-                        <a:latin typeface="Source Sans Pro" panose="020B0503030403020204" pitchFamily="34" charset="0"/>
-                        <a:ea typeface="Source Sans Pro" panose="020B0503030403020204" pitchFamily="34" charset="0"/>
-                      </a:rPr>
-                      <m:t> </m:t>
-                    </m:r>
-                    <m:r>
-                      <m:rPr>
-                        <m:nor/>
-                      </m:rPr>
-                      <a:rPr lang="en-US" dirty="0">
-                        <a:latin typeface="Source Sans Pro" panose="020B0503030403020204" pitchFamily="34" charset="0"/>
-                        <a:ea typeface="Source Sans Pro" panose="020B0503030403020204" pitchFamily="34" charset="0"/>
-                      </a:rPr>
-                      <m:t>constraints</m:t>
-                    </m:r>
-                    <m:r>
-                      <m:rPr>
-                        <m:nor/>
-                      </m:rPr>
-                      <a:rPr lang="en-US" dirty="0">
-                        <a:latin typeface="Source Sans Pro" panose="020B0503030403020204" pitchFamily="34" charset="0"/>
-                        <a:ea typeface="Source Sans Pro" panose="020B0503030403020204" pitchFamily="34" charset="0"/>
-                      </a:rPr>
-                      <m:t> </m:t>
+                      <m:t>with constraints </m:t>
                     </m:r>
                     <m:r>
                       <a:rPr lang="en-US" b="1" dirty="0">
@@ -17072,7 +15710,7 @@
                     <m:d>
                       <m:dPr>
                         <m:ctrlPr>
-                          <a:rPr lang="en-US" b="1" i="1" dirty="0">
+                          <a:rPr lang="en-US" i="1" dirty="0">
                             <a:latin typeface="Cambria Math" panose="02040503050406030204" pitchFamily="18" charset="0"/>
                           </a:rPr>
                         </m:ctrlPr>
@@ -17113,7 +15751,7 @@
                     <m:d>
                       <m:dPr>
                         <m:ctrlPr>
-                          <a:rPr lang="en-US" b="1" i="1" dirty="0">
+                          <a:rPr lang="en-US" i="1" dirty="0">
                             <a:latin typeface="Cambria Math" panose="02040503050406030204" pitchFamily="18" charset="0"/>
                           </a:rPr>
                         </m:ctrlPr>
@@ -17187,7 +15825,7 @@
                     <m:oMathParaPr>
                       <m:jc m:val="center"/>
                     </m:oMathParaPr>
-                    <m:oMath xmlns:m="http://schemas.openxmlformats.org/officeDocument/2006/math">
+                    <m:oMath>
                       <m:r>
                         <m:rPr>
                           <m:sty m:val="p"/>
@@ -17339,7 +15977,7 @@
                       <m:d>
                         <m:dPr>
                           <m:ctrlPr>
-                            <a:rPr lang="en-US" i="1">
+                            <a:rPr lang="en-US" b="1">
                               <a:latin typeface="Cambria Math" panose="02040503050406030204" pitchFamily="18" charset="0"/>
                               <a:ea typeface="Cambria Math" panose="02040503050406030204" pitchFamily="18" charset="0"/>
                             </a:rPr>
@@ -17476,7 +16114,7 @@
           <a:p>
             <a:fld id="{70A45483-37C8-B443-A225-50262C31A035}" type="datetime1">
               <a:rPr lang="en-US" smtClean="0"/>
-              <a:t>5/4/26</a:t>
+              <a:t>8/13/26</a:t>
             </a:fld>
             <a:endParaRPr lang="en-US"/>
           </a:p>
@@ -17727,7 +16365,7 @@
                     <m:d>
                       <m:dPr>
                         <m:ctrlPr>
-                          <a:rPr lang="en-US" sz="2400" i="1">
+                          <a:rPr lang="en-US" sz="2400" b="1">
                             <a:latin typeface="Cambria Math" panose="02040503050406030204" pitchFamily="18" charset="0"/>
                           </a:rPr>
                         </m:ctrlPr>
@@ -17742,7 +16380,7 @@
                         <m:d>
                           <m:dPr>
                             <m:ctrlPr>
-                              <a:rPr lang="en-US" sz="2400" b="1" i="1">
+                              <a:rPr lang="en-US" sz="2400" i="1">
                                 <a:latin typeface="Cambria Math" panose="02040503050406030204" pitchFamily="18" charset="0"/>
                               </a:rPr>
                             </m:ctrlPr>
@@ -17771,7 +16409,7 @@
                         <m:d>
                           <m:dPr>
                             <m:ctrlPr>
-                              <a:rPr lang="en-US" sz="2400" b="1" i="1">
+                              <a:rPr lang="en-US" sz="2400" i="1">
                                 <a:latin typeface="Cambria Math" panose="02040503050406030204" pitchFamily="18" charset="0"/>
                               </a:rPr>
                             </m:ctrlPr>
@@ -17801,41 +16439,11 @@
                       <m:rPr>
                         <m:nor/>
                       </m:rPr>
-                      <a:rPr lang="en-US" sz="2400" dirty="0">
+                      <a:rPr lang="en-US" sz="2400" i="0" dirty="0">
                         <a:latin typeface="Source Sans Pro" panose="020B0503030403020204" pitchFamily="34" charset="0"/>
                         <a:ea typeface="Source Sans Pro" panose="020B0503030403020204" pitchFamily="34" charset="0"/>
                       </a:rPr>
-                      <m:t>with</m:t>
-                    </m:r>
-                    <m:r>
-                      <m:rPr>
-                        <m:nor/>
-                      </m:rPr>
-                      <a:rPr lang="en-US" sz="2400" dirty="0">
-                        <a:latin typeface="Source Sans Pro" panose="020B0503030403020204" pitchFamily="34" charset="0"/>
-                        <a:ea typeface="Source Sans Pro" panose="020B0503030403020204" pitchFamily="34" charset="0"/>
-                      </a:rPr>
-                      <m:t> </m:t>
-                    </m:r>
-                    <m:r>
-                      <m:rPr>
-                        <m:nor/>
-                      </m:rPr>
-                      <a:rPr lang="en-US" sz="2400" dirty="0">
-                        <a:latin typeface="Source Sans Pro" panose="020B0503030403020204" pitchFamily="34" charset="0"/>
-                        <a:ea typeface="Source Sans Pro" panose="020B0503030403020204" pitchFamily="34" charset="0"/>
-                      </a:rPr>
-                      <m:t>constraints</m:t>
-                    </m:r>
-                    <m:r>
-                      <m:rPr>
-                        <m:nor/>
-                      </m:rPr>
-                      <a:rPr lang="en-US" sz="2400" dirty="0">
-                        <a:latin typeface="Source Sans Pro" panose="020B0503030403020204" pitchFamily="34" charset="0"/>
-                        <a:ea typeface="Source Sans Pro" panose="020B0503030403020204" pitchFamily="34" charset="0"/>
-                      </a:rPr>
-                      <m:t> </m:t>
+                      <m:t>with constraints </m:t>
                     </m:r>
                     <m:r>
                       <a:rPr lang="en-US" sz="2400" b="1" dirty="0">
@@ -17846,7 +16454,7 @@
                     <m:d>
                       <m:dPr>
                         <m:ctrlPr>
-                          <a:rPr lang="en-US" sz="2400" b="1" i="1" dirty="0">
+                          <a:rPr lang="en-US" sz="2400" i="1" dirty="0">
                             <a:latin typeface="Cambria Math" panose="02040503050406030204" pitchFamily="18" charset="0"/>
                           </a:rPr>
                         </m:ctrlPr>
@@ -17887,7 +16495,7 @@
                     <m:d>
                       <m:dPr>
                         <m:ctrlPr>
-                          <a:rPr lang="en-US" sz="2400" b="1" i="1" dirty="0">
+                          <a:rPr lang="en-US" sz="2400" i="1" dirty="0">
                             <a:latin typeface="Cambria Math" panose="02040503050406030204" pitchFamily="18" charset="0"/>
                           </a:rPr>
                         </m:ctrlPr>
@@ -18045,7 +16653,7 @@
                     <m:d>
                       <m:dPr>
                         <m:ctrlPr>
-                          <a:rPr lang="en-US" sz="2400" i="1">
+                          <a:rPr lang="en-US" sz="2400" b="1">
                             <a:latin typeface="Cambria Math" panose="02040503050406030204" pitchFamily="18" charset="0"/>
                           </a:rPr>
                         </m:ctrlPr>
@@ -18060,7 +16668,7 @@
                         <m:d>
                           <m:dPr>
                             <m:ctrlPr>
-                              <a:rPr lang="en-US" sz="2400" b="1" i="1">
+                              <a:rPr lang="en-US" sz="2400" i="1">
                                 <a:latin typeface="Cambria Math" panose="02040503050406030204" pitchFamily="18" charset="0"/>
                               </a:rPr>
                             </m:ctrlPr>
@@ -18089,7 +16697,7 @@
                         <m:d>
                           <m:dPr>
                             <m:ctrlPr>
-                              <a:rPr lang="en-US" sz="2400" b="1" i="1">
+                              <a:rPr lang="en-US" sz="2400" i="1">
                                 <a:latin typeface="Cambria Math" panose="02040503050406030204" pitchFamily="18" charset="0"/>
                               </a:rPr>
                             </m:ctrlPr>
@@ -18154,7 +16762,7 @@
                     <m:sSub>
                       <m:sSubPr>
                         <m:ctrlPr>
-                          <a:rPr lang="en-US" sz="2400" b="0" i="1" smtClean="0">
+                          <a:rPr lang="en-US" sz="2400" i="1">
                             <a:latin typeface="Cambria Math" panose="02040503050406030204" pitchFamily="18" charset="0"/>
                           </a:rPr>
                         </m:ctrlPr>
@@ -18277,7 +16885,7 @@
                     <m:d>
                       <m:dPr>
                         <m:ctrlPr>
-                          <a:rPr lang="en-US" sz="2400" i="1">
+                          <a:rPr lang="en-US" sz="2400" b="1">
                             <a:latin typeface="Cambria Math" panose="02040503050406030204" pitchFamily="18" charset="0"/>
                           </a:rPr>
                         </m:ctrlPr>
@@ -18292,7 +16900,7 @@
                         <m:d>
                           <m:dPr>
                             <m:ctrlPr>
-                              <a:rPr lang="en-US" sz="2400" b="1" i="1">
+                              <a:rPr lang="en-US" sz="2400" i="1">
                                 <a:latin typeface="Cambria Math" panose="02040503050406030204" pitchFamily="18" charset="0"/>
                               </a:rPr>
                             </m:ctrlPr>
@@ -18321,7 +16929,7 @@
                         <m:d>
                           <m:dPr>
                             <m:ctrlPr>
-                              <a:rPr lang="en-US" sz="2400" b="1" i="1">
+                              <a:rPr lang="en-US" sz="2400" i="1">
                                 <a:latin typeface="Cambria Math" panose="02040503050406030204" pitchFamily="18" charset="0"/>
                               </a:rPr>
                             </m:ctrlPr>
@@ -18341,7 +16949,7 @@
                       <m:rPr>
                         <m:nor/>
                       </m:rPr>
-                      <a:rPr lang="en-US" sz="2400">
+                      <a:rPr lang="en-US" sz="2400" i="0">
                         <a:latin typeface="Source Sans Pro" panose="020B0503030403020204" pitchFamily="34" charset="0"/>
                         <a:ea typeface="Source Sans Pro" panose="020B0503030403020204" pitchFamily="34" charset="0"/>
                       </a:rPr>
@@ -18351,41 +16959,11 @@
                       <m:rPr>
                         <m:nor/>
                       </m:rPr>
-                      <a:rPr lang="en-US" sz="2400" dirty="0">
+                      <a:rPr lang="en-US" sz="2400" i="0" dirty="0">
                         <a:latin typeface="Source Sans Pro" panose="020B0503030403020204" pitchFamily="34" charset="0"/>
                         <a:ea typeface="Source Sans Pro" panose="020B0503030403020204" pitchFamily="34" charset="0"/>
                       </a:rPr>
-                      <m:t>with</m:t>
-                    </m:r>
-                    <m:r>
-                      <m:rPr>
-                        <m:nor/>
-                      </m:rPr>
-                      <a:rPr lang="en-US" sz="2400" dirty="0">
-                        <a:latin typeface="Source Sans Pro" panose="020B0503030403020204" pitchFamily="34" charset="0"/>
-                        <a:ea typeface="Source Sans Pro" panose="020B0503030403020204" pitchFamily="34" charset="0"/>
-                      </a:rPr>
-                      <m:t> </m:t>
-                    </m:r>
-                    <m:r>
-                      <m:rPr>
-                        <m:nor/>
-                      </m:rPr>
-                      <a:rPr lang="en-US" sz="2400" dirty="0">
-                        <a:latin typeface="Source Sans Pro" panose="020B0503030403020204" pitchFamily="34" charset="0"/>
-                        <a:ea typeface="Source Sans Pro" panose="020B0503030403020204" pitchFamily="34" charset="0"/>
-                      </a:rPr>
-                      <m:t>constraints</m:t>
-                    </m:r>
-                    <m:r>
-                      <m:rPr>
-                        <m:nor/>
-                      </m:rPr>
-                      <a:rPr lang="en-US" sz="2400" dirty="0">
-                        <a:latin typeface="Source Sans Pro" panose="020B0503030403020204" pitchFamily="34" charset="0"/>
-                        <a:ea typeface="Source Sans Pro" panose="020B0503030403020204" pitchFamily="34" charset="0"/>
-                      </a:rPr>
-                      <m:t> </m:t>
+                      <m:t>with constraints </m:t>
                     </m:r>
                     <m:r>
                       <a:rPr lang="en-US" sz="2400" b="1" dirty="0">
@@ -18396,7 +16974,7 @@
                     <m:d>
                       <m:dPr>
                         <m:ctrlPr>
-                          <a:rPr lang="en-US" sz="2400" b="1" i="1" dirty="0">
+                          <a:rPr lang="en-US" sz="2400" i="1" dirty="0">
                             <a:latin typeface="Cambria Math" panose="02040503050406030204" pitchFamily="18" charset="0"/>
                           </a:rPr>
                         </m:ctrlPr>
@@ -18437,7 +17015,7 @@
                     <m:d>
                       <m:dPr>
                         <m:ctrlPr>
-                          <a:rPr lang="en-US" sz="2400" b="1" i="1" dirty="0">
+                          <a:rPr lang="en-US" sz="2400" i="1" dirty="0">
                             <a:latin typeface="Cambria Math" panose="02040503050406030204" pitchFamily="18" charset="0"/>
                           </a:rPr>
                         </m:ctrlPr>
@@ -18621,7 +17199,7 @@
                     <m:d>
                       <m:dPr>
                         <m:ctrlPr>
-                          <a:rPr lang="en-US" sz="2400" i="1">
+                          <a:rPr lang="en-US" sz="2400" b="1">
                             <a:latin typeface="Cambria Math" panose="02040503050406030204" pitchFamily="18" charset="0"/>
                           </a:rPr>
                         </m:ctrlPr>
@@ -18636,7 +17214,7 @@
                         <m:d>
                           <m:dPr>
                             <m:ctrlPr>
-                              <a:rPr lang="en-US" sz="2400" b="1" i="1">
+                              <a:rPr lang="en-US" sz="2400" i="1">
                                 <a:latin typeface="Cambria Math" panose="02040503050406030204" pitchFamily="18" charset="0"/>
                               </a:rPr>
                             </m:ctrlPr>
@@ -18713,7 +17291,7 @@
                     <m:d>
                       <m:dPr>
                         <m:ctrlPr>
-                          <a:rPr lang="en-US" sz="2400" i="1">
+                          <a:rPr lang="en-US" sz="2400" b="1">
                             <a:latin typeface="Cambria Math" panose="02040503050406030204" pitchFamily="18" charset="0"/>
                           </a:rPr>
                         </m:ctrlPr>
@@ -18728,7 +17306,7 @@
                         <m:d>
                           <m:dPr>
                             <m:ctrlPr>
-                              <a:rPr lang="en-US" sz="2400" b="1" i="1">
+                              <a:rPr lang="en-US" sz="2400" i="1">
                                 <a:latin typeface="Cambria Math" panose="02040503050406030204" pitchFamily="18" charset="0"/>
                               </a:rPr>
                             </m:ctrlPr>
@@ -18892,7 +17470,7 @@
           <a:p>
             <a:fld id="{C707CF11-0A66-AC4A-8BF4-18BC1CC9E6C0}" type="datetime1">
               <a:rPr lang="en-US" smtClean="0"/>
-              <a:t>5/4/26</a:t>
+              <a:t>8/13/26</a:t>
             </a:fld>
             <a:endParaRPr lang="en-US"/>
           </a:p>
@@ -19054,7 +17632,7 @@
                     <m:oMathParaPr>
                       <m:jc m:val="center"/>
                     </m:oMathParaPr>
-                    <m:oMath xmlns:m="http://schemas.openxmlformats.org/officeDocument/2006/math">
+                    <m:oMath>
                       <m:sSub>
                         <m:sSubPr>
                           <m:ctrlPr>
@@ -19091,7 +17669,7 @@
                           <m:begChr m:val="{"/>
                           <m:endChr m:val="|"/>
                           <m:ctrlPr>
-                            <a:rPr lang="en-US" sz="2400" i="1">
+                            <a:rPr lang="en-US" sz="2400" b="1" i="1">
                               <a:latin typeface="Cambria Math" panose="02040503050406030204" pitchFamily="18" charset="0"/>
                             </a:rPr>
                           </m:ctrlPr>
@@ -19100,7 +17678,7 @@
                           <m:sSub>
                             <m:sSubPr>
                               <m:ctrlPr>
-                                <a:rPr lang="en-US" sz="2400" b="1" i="1">
+                                <a:rPr lang="en-US" sz="2400" b="1">
                                   <a:latin typeface="Cambria Math" panose="02040503050406030204" pitchFamily="18" charset="0"/>
                                 </a:rPr>
                               </m:ctrlPr>
@@ -19168,7 +17746,7 @@
                           <m:sSub>
                             <m:sSubPr>
                               <m:ctrlPr>
-                                <a:rPr lang="en-US" sz="2400" i="1">
+                                <a:rPr lang="en-US" sz="2400" b="1">
                                   <a:latin typeface="Cambria Math" panose="02040503050406030204" pitchFamily="18" charset="0"/>
                                   <a:ea typeface="Cambria Math" panose="02040503050406030204" pitchFamily="18" charset="0"/>
                                 </a:rPr>
@@ -19203,7 +17781,7 @@
                           <m:sSub>
                             <m:sSubPr>
                               <m:ctrlPr>
-                                <a:rPr lang="en-US" sz="2400" i="1">
+                                <a:rPr lang="en-US" sz="2400" b="1">
                                   <a:latin typeface="Cambria Math" panose="02040503050406030204" pitchFamily="18" charset="0"/>
                                   <a:ea typeface="Cambria Math" panose="02040503050406030204" pitchFamily="18" charset="0"/>
                                 </a:rPr>
@@ -19281,7 +17859,7 @@
                       <m:sSub>
                         <m:sSubPr>
                           <m:ctrlPr>
-                            <a:rPr lang="en-US" sz="2400" i="1">
+                            <a:rPr lang="en-US" sz="2400" b="1">
                               <a:latin typeface="Cambria Math" panose="02040503050406030204" pitchFamily="18" charset="0"/>
                               <a:ea typeface="Cambria Math" panose="02040503050406030204" pitchFamily="18" charset="0"/>
                             </a:rPr>
@@ -19330,7 +17908,7 @@
                       <m:sSub>
                         <m:sSubPr>
                           <m:ctrlPr>
-                            <a:rPr lang="en-US" sz="2400" i="1">
+                            <a:rPr lang="en-US" sz="2400" b="1">
                               <a:latin typeface="Cambria Math" panose="02040503050406030204" pitchFamily="18" charset="0"/>
                               <a:ea typeface="Cambria Math" panose="02040503050406030204" pitchFamily="18" charset="0"/>
                             </a:rPr>
@@ -19421,11 +17999,11 @@
                     <m:oMathParaPr>
                       <m:jc m:val="center"/>
                     </m:oMathParaPr>
-                    <m:oMath xmlns:m="http://schemas.openxmlformats.org/officeDocument/2006/math">
+                    <m:oMath>
                       <m:sSub>
                         <m:sSubPr>
                           <m:ctrlPr>
-                            <a:rPr lang="en-US" sz="2400" i="1">
+                            <a:rPr lang="en-US" sz="2400" b="1">
                               <a:latin typeface="Cambria Math" panose="02040503050406030204" pitchFamily="18" charset="0"/>
                               <a:ea typeface="Cambria Math" panose="02040503050406030204" pitchFamily="18" charset="0"/>
                             </a:rPr>
@@ -19512,7 +18090,7 @@
                       <m:sSub>
                         <m:sSubPr>
                           <m:ctrlPr>
-                            <a:rPr lang="en-US" sz="2400" i="1">
+                            <a:rPr lang="en-US" sz="2400" b="1">
                               <a:latin typeface="Cambria Math" panose="02040503050406030204" pitchFamily="18" charset="0"/>
                               <a:ea typeface="Cambria Math" panose="02040503050406030204" pitchFamily="18" charset="0"/>
                             </a:rPr>
@@ -19561,7 +18139,7 @@
                       <m:sSub>
                         <m:sSubPr>
                           <m:ctrlPr>
-                            <a:rPr lang="en-US" sz="2400" i="1">
+                            <a:rPr lang="en-US" sz="2400" b="1">
                               <a:latin typeface="Cambria Math" panose="02040503050406030204" pitchFamily="18" charset="0"/>
                               <a:ea typeface="Cambria Math" panose="02040503050406030204" pitchFamily="18" charset="0"/>
                             </a:rPr>
@@ -19603,7 +18181,7 @@
                       <m:sSub>
                         <m:sSubPr>
                           <m:ctrlPr>
-                            <a:rPr lang="en-US" sz="2400" i="1">
+                            <a:rPr lang="en-US" sz="2400" b="1">
                               <a:latin typeface="Cambria Math" panose="02040503050406030204" pitchFamily="18" charset="0"/>
                               <a:ea typeface="Cambria Math" panose="02040503050406030204" pitchFamily="18" charset="0"/>
                             </a:rPr>
@@ -20062,7 +18640,7 @@
           <a:p>
             <a:fld id="{A289C873-7E79-2240-8AD8-C0B3EBC26316}" type="datetime1">
               <a:rPr lang="en-US" smtClean="0"/>
-              <a:t>5/4/26</a:t>
+              <a:t>8/13/26</a:t>
             </a:fld>
             <a:endParaRPr lang="en-US"/>
           </a:p>
@@ -20234,7 +18812,7 @@
                     <m:d>
                       <m:dPr>
                         <m:ctrlPr>
-                          <a:rPr lang="en-US" i="1">
+                          <a:rPr lang="en-US" b="0" i="1" smtClean="0">
                             <a:latin typeface="Cambria Math" panose="02040503050406030204" pitchFamily="18" charset="0"/>
                           </a:rPr>
                         </m:ctrlPr>
@@ -20533,10 +19111,7 @@
                 </a:pPr>
                 <a14:m>
                   <m:oMathPara xmlns:m="http://schemas.openxmlformats.org/officeDocument/2006/math">
-                    <m:oMathParaPr>
-                      <m:jc m:val="centerGroup"/>
-                    </m:oMathParaPr>
-                    <m:oMath xmlns:m="http://schemas.openxmlformats.org/officeDocument/2006/math">
+                    <m:oMath>
                       <m:r>
                         <a:rPr lang="en-US" b="0" i="1" smtClean="0">
                           <a:latin typeface="Cambria Math" panose="02040503050406030204" pitchFamily="18" charset="0"/>
@@ -20896,7 +19471,7 @@
                         <m:sSub>
                           <m:sSubPr>
                             <m:ctrlPr>
-                              <a:rPr lang="en-US" b="0" i="1" smtClean="0">
+                              <a:rPr lang="en-US" b="1" i="0" smtClean="0">
                                 <a:latin typeface="Cambria Math" panose="02040503050406030204" pitchFamily="18" charset="0"/>
                               </a:rPr>
                             </m:ctrlPr>
@@ -20947,7 +19522,7 @@
                     <m:sSub>
                       <m:sSubPr>
                         <m:ctrlPr>
-                          <a:rPr lang="en-US" b="0" i="1" smtClean="0">
+                          <a:rPr lang="en-US" b="1" i="0" smtClean="0">
                             <a:latin typeface="Cambria Math" panose="02040503050406030204" pitchFamily="18" charset="0"/>
                           </a:rPr>
                         </m:ctrlPr>
@@ -21026,7 +19601,7 @@
                     <m:sSub>
                       <m:sSubPr>
                         <m:ctrlPr>
-                          <a:rPr lang="en-US" b="0" i="1" smtClean="0">
+                          <a:rPr lang="en-US" b="1" i="0" smtClean="0">
                             <a:latin typeface="Cambria Math" panose="02040503050406030204" pitchFamily="18" charset="0"/>
                           </a:rPr>
                         </m:ctrlPr>
@@ -21229,7 +19804,7 @@
                     <m:sSub>
                       <m:sSubPr>
                         <m:ctrlPr>
-                          <a:rPr lang="en-US" b="0" i="1" smtClean="0">
+                          <a:rPr lang="en-US" i="1">
                             <a:latin typeface="Cambria Math" panose="02040503050406030204" pitchFamily="18" charset="0"/>
                           </a:rPr>
                         </m:ctrlPr>
@@ -21337,7 +19912,7 @@
           <a:p>
             <a:fld id="{FE47E0EF-F64E-F244-92E8-A6B45C811AE5}" type="datetime1">
               <a:rPr lang="en-US" smtClean="0"/>
-              <a:t>5/4/26</a:t>
+              <a:t>8/13/26</a:t>
             </a:fld>
             <a:endParaRPr lang="en-US"/>
           </a:p>
@@ -21507,7 +20082,7 @@
                     <m:sSub>
                       <m:sSubPr>
                         <m:ctrlPr>
-                          <a:rPr lang="en-US" b="1" i="1" smtClean="0">
+                          <a:rPr lang="en-US" b="1" i="0" smtClean="0">
                             <a:latin typeface="Cambria Math" panose="02040503050406030204" pitchFamily="18" charset="0"/>
                           </a:rPr>
                         </m:ctrlPr>
@@ -21618,7 +20193,7 @@
                     <m:sSubSup>
                       <m:sSubSupPr>
                         <m:ctrlPr>
-                          <a:rPr lang="en-US" b="0" i="1" smtClean="0">
+                          <a:rPr lang="en-US" b="1" i="0" smtClean="0">
                             <a:latin typeface="Cambria Math" panose="02040503050406030204" pitchFamily="18" charset="0"/>
                           </a:rPr>
                         </m:ctrlPr>
@@ -21667,7 +20242,7 @@
                     <m:sSub>
                       <m:sSubPr>
                         <m:ctrlPr>
-                          <a:rPr lang="en-US" b="0" i="1" smtClean="0">
+                          <a:rPr lang="en-US" b="1" i="0" smtClean="0">
                             <a:latin typeface="Cambria Math" panose="02040503050406030204" pitchFamily="18" charset="0"/>
                           </a:rPr>
                         </m:ctrlPr>
@@ -21704,7 +20279,7 @@
                     <m:sSub>
                       <m:sSubPr>
                         <m:ctrlPr>
-                          <a:rPr lang="en-US" b="0" i="1" smtClean="0">
+                          <a:rPr lang="en-US" b="1" i="0" smtClean="0">
                             <a:latin typeface="Cambria Math" panose="02040503050406030204" pitchFamily="18" charset="0"/>
                           </a:rPr>
                         </m:ctrlPr>
@@ -21741,7 +20316,7 @@
                     <m:sSubSup>
                       <m:sSubSupPr>
                         <m:ctrlPr>
-                          <a:rPr lang="en-US" b="0" i="1" smtClean="0">
+                          <a:rPr lang="en-US" b="1" i="0" smtClean="0">
                             <a:latin typeface="Cambria Math" panose="02040503050406030204" pitchFamily="18" charset="0"/>
                           </a:rPr>
                         </m:ctrlPr>
@@ -21842,7 +20417,7 @@
                     <m:sSub>
                       <m:sSubPr>
                         <m:ctrlPr>
-                          <a:rPr lang="en-US" b="0" i="1" smtClean="0">
+                          <a:rPr lang="en-US" b="1" i="0" smtClean="0">
                             <a:latin typeface="Cambria Math" panose="02040503050406030204" pitchFamily="18" charset="0"/>
                           </a:rPr>
                         </m:ctrlPr>
@@ -21996,14 +20571,11 @@
                 </a:pPr>
                 <a14:m>
                   <m:oMathPara xmlns:m="http://schemas.openxmlformats.org/officeDocument/2006/math">
-                    <m:oMathParaPr>
-                      <m:jc m:val="centerGroup"/>
-                    </m:oMathParaPr>
-                    <m:oMath xmlns:m="http://schemas.openxmlformats.org/officeDocument/2006/math">
+                    <m:oMath>
                       <m:sSub>
                         <m:sSubPr>
                           <m:ctrlPr>
-                            <a:rPr lang="en-US" b="0" i="1" smtClean="0">
+                            <a:rPr lang="en-US" b="1" i="0" smtClean="0">
                               <a:latin typeface="Cambria Math" panose="02040503050406030204" pitchFamily="18" charset="0"/>
                             </a:rPr>
                           </m:ctrlPr>
@@ -22142,7 +20714,7 @@
           <a:p>
             <a:fld id="{CF51CA7D-81B2-A343-A4E1-D84B85389156}" type="datetime1">
               <a:rPr lang="en-US" smtClean="0"/>
-              <a:t>5/4/26</a:t>
+              <a:t>8/13/26</a:t>
             </a:fld>
             <a:endParaRPr lang="en-US"/>
           </a:p>
@@ -22524,7 +21096,7 @@
           <a:p>
             <a:fld id="{C8A4C5B3-68E5-1640-AEE1-FB97EBC9466F}" type="datetime1">
               <a:rPr lang="en-US" smtClean="0"/>
-              <a:t>5/4/26</a:t>
+              <a:t>8/13/26</a:t>
             </a:fld>
             <a:endParaRPr lang="en-US"/>
           </a:p>
@@ -22716,7 +21288,7 @@
           <a:p>
             <a:fld id="{BCFB6AF8-0196-2949-9516-CA604195C328}" type="datetime1">
               <a:rPr lang="en-US" smtClean="0"/>
-              <a:t>5/4/26</a:t>
+              <a:t>8/13/26</a:t>
             </a:fld>
             <a:endParaRPr lang="en-US"/>
           </a:p>
@@ -22955,7 +21527,7 @@
           <a:p>
             <a:fld id="{B9132CAD-6E84-944C-9858-0F89F6649A68}" type="datetime1">
               <a:rPr lang="en-US" smtClean="0"/>
-              <a:t>5/4/26</a:t>
+              <a:t>8/13/26</a:t>
             </a:fld>
             <a:endParaRPr lang="en-US"/>
           </a:p>
@@ -23172,7 +21744,7 @@
           <a:p>
             <a:fld id="{EC226096-9360-5E4F-88CD-60904F2010DA}" type="datetime1">
               <a:rPr lang="en-US" smtClean="0"/>
-              <a:t>5/4/26</a:t>
+              <a:t>8/13/26</a:t>
             </a:fld>
             <a:endParaRPr lang="en-US"/>
           </a:p>
@@ -23492,7 +22064,7 @@
           <a:p>
             <a:fld id="{8CD5152F-DF2F-A446-9543-0911EC3070B8}" type="datetime1">
               <a:rPr lang="en-US" smtClean="0"/>
-              <a:t>5/4/26</a:t>
+              <a:t>8/13/26</a:t>
             </a:fld>
             <a:endParaRPr lang="en-US"/>
           </a:p>
@@ -23881,7 +22453,7 @@
           <a:p>
             <a:fld id="{5D1151B4-FD1E-6243-BC38-4646C75FB074}" type="datetime1">
               <a:rPr lang="en-US" smtClean="0"/>
-              <a:t>5/4/26</a:t>
+              <a:t>8/13/26</a:t>
             </a:fld>
             <a:endParaRPr lang="en-US"/>
           </a:p>
@@ -24316,10 +22888,7 @@
                 </a:pPr>
                 <a14:m>
                   <m:oMathPara xmlns:m="http://schemas.openxmlformats.org/officeDocument/2006/math">
-                    <m:oMathParaPr>
-                      <m:jc m:val="centerGroup"/>
-                    </m:oMathParaPr>
-                    <m:oMath xmlns:m="http://schemas.openxmlformats.org/officeDocument/2006/math">
+                    <m:oMath>
                       <m:r>
                         <a:rPr lang="en-US" b="1" i="0" smtClean="0">
                           <a:latin typeface="Cambria Math" panose="02040503050406030204" pitchFamily="18" charset="0"/>
@@ -24548,7 +23117,7 @@
           <a:p>
             <a:fld id="{B6E80B3A-B558-074F-9575-472BD89D2C64}" type="datetime1">
               <a:rPr lang="en-US" smtClean="0"/>
-              <a:t>5/4/26</a:t>
+              <a:t>8/13/26</a:t>
             </a:fld>
             <a:endParaRPr lang="en-US"/>
           </a:p>
@@ -24776,7 +23345,7 @@
                     <m:oMathParaPr>
                       <m:jc m:val="center"/>
                     </m:oMathParaPr>
-                    <m:oMath xmlns:m="http://schemas.openxmlformats.org/officeDocument/2006/math">
+                    <m:oMath>
                       <m:sSubSup>
                         <m:sSubSupPr>
                           <m:ctrlPr>
@@ -24813,7 +23382,7 @@
                       <m:d>
                         <m:dPr>
                           <m:ctrlPr>
-                            <a:rPr lang="en-US" sz="2400" b="0" i="1" smtClean="0">
+                            <a:rPr lang="en-US" sz="2400" b="1" i="0" smtClean="0">
                               <a:latin typeface="Cambria Math" panose="02040503050406030204" pitchFamily="18" charset="0"/>
                             </a:rPr>
                           </m:ctrlPr>
@@ -24862,7 +23431,7 @@
                           <m:limLow>
                             <m:limLowPr>
                               <m:ctrlPr>
-                                <a:rPr lang="en-US" sz="2400" b="0" i="1" smtClean="0">
+                                <a:rPr lang="en-US" sz="2400" b="0" i="0" smtClean="0">
                                   <a:latin typeface="Cambria Math" panose="02040503050406030204" pitchFamily="18" charset="0"/>
                                 </a:rPr>
                               </m:ctrlPr>
@@ -24882,7 +23451,7 @@
                               <m:sSub>
                                 <m:sSubPr>
                                   <m:ctrlPr>
-                                    <a:rPr lang="en-US" sz="2400" b="0" i="1" smtClean="0">
+                                    <a:rPr lang="en-US" sz="2400" b="1" i="0" smtClean="0">
                                       <a:latin typeface="Cambria Math" panose="02040503050406030204" pitchFamily="18" charset="0"/>
                                     </a:rPr>
                                   </m:ctrlPr>
@@ -24925,7 +23494,7 @@
                               <m:sSub>
                                 <m:sSubPr>
                                   <m:ctrlPr>
-                                    <a:rPr lang="en-US" sz="2400" i="1">
+                                    <a:rPr lang="en-US" sz="2400" b="1" i="0">
                                       <a:latin typeface="Cambria Math" panose="02040503050406030204" pitchFamily="18" charset="0"/>
                                     </a:rPr>
                                   </m:ctrlPr>
@@ -24993,7 +23562,7 @@
                               <m:sSub>
                                 <m:sSubPr>
                                   <m:ctrlPr>
-                                    <a:rPr lang="en-US" sz="2400" b="0" i="1" smtClean="0">
+                                    <a:rPr lang="en-US" sz="2400" b="1" i="0" smtClean="0">
                                       <a:latin typeface="Cambria Math" panose="02040503050406030204" pitchFamily="18" charset="0"/>
                                     </a:rPr>
                                   </m:ctrlPr>
@@ -25053,7 +23622,7 @@
                         <m:naryPr>
                           <m:chr m:val="∑"/>
                           <m:ctrlPr>
-                            <a:rPr lang="en-US" sz="2400" i="1">
+                            <a:rPr lang="en-US" sz="2400" b="0" i="1" smtClean="0">
                               <a:latin typeface="Cambria Math" panose="02040503050406030204" pitchFamily="18" charset="0"/>
                             </a:rPr>
                           </m:ctrlPr>
@@ -25105,7 +23674,7 @@
                           <m:sSub>
                             <m:sSubPr>
                               <m:ctrlPr>
-                                <a:rPr lang="en-US" sz="2400" b="0" i="1" smtClean="0">
+                                <a:rPr lang="en-US" sz="2400" b="1" i="0" smtClean="0">
                                   <a:latin typeface="Cambria Math" panose="02040503050406030204" pitchFamily="18" charset="0"/>
                                 </a:rPr>
                               </m:ctrlPr>
@@ -25160,7 +23729,7 @@
                           <m:sSub>
                             <m:sSubPr>
                               <m:ctrlPr>
-                                <a:rPr lang="en-US" sz="2400" b="0" i="1" smtClean="0">
+                                <a:rPr lang="en-US" sz="2400" b="1" i="0" smtClean="0">
                                   <a:latin typeface="Cambria Math" panose="02040503050406030204" pitchFamily="18" charset="0"/>
                                 </a:rPr>
                               </m:ctrlPr>
@@ -25248,7 +23817,7 @@
                 <a:ext cx="10757452" cy="4351338"/>
               </a:xfrm>
               <a:blipFill>
-                <a:blip r:embed="rId2"/>
+                <a:blip r:embed="rId3"/>
                 <a:stretch>
                   <a:fillRect l="-943" t="-2632"/>
                 </a:stretch>
@@ -25311,7 +23880,7 @@
                     <m:sSub>
                       <m:sSubPr>
                         <m:ctrlPr>
-                          <a:rPr lang="en-US" sz="2400" i="1">
+                          <a:rPr lang="en-US" sz="2400" b="1" i="0" smtClean="0">
                             <a:latin typeface="Cambria Math" panose="02040503050406030204" pitchFamily="18" charset="0"/>
                           </a:rPr>
                         </m:ctrlPr>
@@ -25384,7 +23953,7 @@
                     <m:sSub>
                       <m:sSubPr>
                         <m:ctrlPr>
-                          <a:rPr lang="en-US" sz="2400" i="1">
+                          <a:rPr lang="en-US" sz="2400" b="1">
                             <a:latin typeface="Cambria Math" panose="02040503050406030204" pitchFamily="18" charset="0"/>
                           </a:rPr>
                         </m:ctrlPr>
@@ -25445,7 +24014,7 @@
                     <m:sSub>
                       <m:sSubPr>
                         <m:ctrlPr>
-                          <a:rPr lang="en-US" sz="2400" i="1">
+                          <a:rPr lang="en-US" sz="2400" b="1" i="0" smtClean="0">
                             <a:latin typeface="Cambria Math" panose="02040503050406030204" pitchFamily="18" charset="0"/>
                           </a:rPr>
                         </m:ctrlPr>
@@ -25555,7 +24124,7 @@
                 <a:avLst/>
               </a:prstGeom>
               <a:blipFill>
-                <a:blip r:embed="rId3"/>
+                <a:blip r:embed="rId4"/>
                 <a:stretch>
                   <a:fillRect l="-1089" t="-7500" b="-22500"/>
                 </a:stretch>
@@ -25615,7 +24184,7 @@
                     <m:sSub>
                       <m:sSubPr>
                         <m:ctrlPr>
-                          <a:rPr lang="en-US" sz="2400" i="1">
+                          <a:rPr lang="en-US" sz="2400" b="1" i="0" smtClean="0">
                             <a:latin typeface="Cambria Math" panose="02040503050406030204" pitchFamily="18" charset="0"/>
                           </a:rPr>
                         </m:ctrlPr>
@@ -25688,7 +24257,7 @@
                     <m:sSub>
                       <m:sSubPr>
                         <m:ctrlPr>
-                          <a:rPr lang="en-US" sz="2400" i="1">
+                          <a:rPr lang="en-US" sz="2400" b="1" i="0" smtClean="0">
                             <a:latin typeface="Cambria Math" panose="02040503050406030204" pitchFamily="18" charset="0"/>
                           </a:rPr>
                         </m:ctrlPr>
@@ -25813,7 +24382,7 @@
                 <a:avLst/>
               </a:prstGeom>
               <a:blipFill>
-                <a:blip r:embed="rId4"/>
+                <a:blip r:embed="rId5"/>
                 <a:stretch>
                   <a:fillRect b="-12500"/>
                 </a:stretch>
@@ -25873,7 +24442,7 @@
                     <m:sSub>
                       <m:sSubPr>
                         <m:ctrlPr>
-                          <a:rPr lang="en-US" sz="2400" i="1">
+                          <a:rPr lang="en-US" sz="2400" b="1" i="0" smtClean="0">
                             <a:latin typeface="Cambria Math" panose="02040503050406030204" pitchFamily="18" charset="0"/>
                           </a:rPr>
                         </m:ctrlPr>
@@ -25987,7 +24556,7 @@
                 <a:avLst/>
               </a:prstGeom>
               <a:blipFill>
-                <a:blip r:embed="rId5"/>
+                <a:blip r:embed="rId6"/>
                 <a:stretch>
                   <a:fillRect b="-12500"/>
                 </a:stretch>
@@ -26047,7 +24616,7 @@
                     <m:sSub>
                       <m:sSubPr>
                         <m:ctrlPr>
-                          <a:rPr lang="en-US" sz="2400" i="1">
+                          <a:rPr lang="en-US" sz="2400" b="1" i="0" smtClean="0">
                             <a:latin typeface="Cambria Math" panose="02040503050406030204" pitchFamily="18" charset="0"/>
                           </a:rPr>
                         </m:ctrlPr>
@@ -26148,7 +24717,7 @@
                 <a:avLst/>
               </a:prstGeom>
               <a:blipFill>
-                <a:blip r:embed="rId6"/>
+                <a:blip r:embed="rId7"/>
                 <a:stretch>
                   <a:fillRect b="-12500"/>
                 </a:stretch>
@@ -26192,7 +24761,7 @@
           <a:p>
             <a:fld id="{26EE1E8D-28BC-E44F-8036-8E7116BA4255}" type="datetime1">
               <a:rPr lang="en-US" smtClean="0"/>
-              <a:t>5/4/26</a:t>
+              <a:t>8/13/26</a:t>
             </a:fld>
             <a:endParaRPr lang="en-US"/>
           </a:p>
@@ -26420,7 +24989,7 @@
                     <m:oMathParaPr>
                       <m:jc m:val="center"/>
                     </m:oMathParaPr>
-                    <m:oMath xmlns:m="http://schemas.openxmlformats.org/officeDocument/2006/math">
+                    <m:oMath>
                       <m:sSubSup>
                         <m:sSubSupPr>
                           <m:ctrlPr>
@@ -26457,7 +25026,7 @@
                       <m:d>
                         <m:dPr>
                           <m:ctrlPr>
-                            <a:rPr lang="en-US" sz="2400" b="0" i="1" smtClean="0">
+                            <a:rPr lang="en-US" sz="2400" b="1" i="0" smtClean="0">
                               <a:latin typeface="Cambria Math" panose="02040503050406030204" pitchFamily="18" charset="0"/>
                             </a:rPr>
                           </m:ctrlPr>
@@ -26506,7 +25075,7 @@
                           <m:limLow>
                             <m:limLowPr>
                               <m:ctrlPr>
-                                <a:rPr lang="en-US" sz="2400" b="0" i="1" smtClean="0">
+                                <a:rPr lang="en-US" sz="2400" b="0" i="0" smtClean="0">
                                   <a:latin typeface="Cambria Math" panose="02040503050406030204" pitchFamily="18" charset="0"/>
                                 </a:rPr>
                               </m:ctrlPr>
@@ -26526,7 +25095,7 @@
                               <m:sSub>
                                 <m:sSubPr>
                                   <m:ctrlPr>
-                                    <a:rPr lang="en-US" sz="2400" b="0" i="1" smtClean="0">
+                                    <a:rPr lang="en-US" sz="2400" b="1" i="0" smtClean="0">
                                       <a:latin typeface="Cambria Math" panose="02040503050406030204" pitchFamily="18" charset="0"/>
                                     </a:rPr>
                                   </m:ctrlPr>
@@ -26569,7 +25138,7 @@
                               <m:sSub>
                                 <m:sSubPr>
                                   <m:ctrlPr>
-                                    <a:rPr lang="en-US" sz="2400" i="1">
+                                    <a:rPr lang="en-US" sz="2400" b="1" i="0">
                                       <a:latin typeface="Cambria Math" panose="02040503050406030204" pitchFamily="18" charset="0"/>
                                     </a:rPr>
                                   </m:ctrlPr>
@@ -26637,7 +25206,7 @@
                               <m:sSub>
                                 <m:sSubPr>
                                   <m:ctrlPr>
-                                    <a:rPr lang="en-US" sz="2400" b="0" i="1" smtClean="0">
+                                    <a:rPr lang="en-US" sz="2400" b="1" i="0" smtClean="0">
                                       <a:latin typeface="Cambria Math" panose="02040503050406030204" pitchFamily="18" charset="0"/>
                                     </a:rPr>
                                   </m:ctrlPr>
@@ -26697,7 +25266,7 @@
                         <m:naryPr>
                           <m:chr m:val="∑"/>
                           <m:ctrlPr>
-                            <a:rPr lang="en-US" sz="2400" i="1">
+                            <a:rPr lang="en-US" sz="2400" b="0" i="1" smtClean="0">
                               <a:latin typeface="Cambria Math" panose="02040503050406030204" pitchFamily="18" charset="0"/>
                             </a:rPr>
                           </m:ctrlPr>
@@ -26749,7 +25318,7 @@
                           <m:sSub>
                             <m:sSubPr>
                               <m:ctrlPr>
-                                <a:rPr lang="en-US" sz="2400" b="0" i="1" smtClean="0">
+                                <a:rPr lang="en-US" sz="2400" b="1" i="0" smtClean="0">
                                   <a:latin typeface="Cambria Math" panose="02040503050406030204" pitchFamily="18" charset="0"/>
                                 </a:rPr>
                               </m:ctrlPr>
@@ -26804,7 +25373,7 @@
                           <m:sSub>
                             <m:sSubPr>
                               <m:ctrlPr>
-                                <a:rPr lang="en-US" sz="2400" b="0" i="1" smtClean="0">
+                                <a:rPr lang="en-US" sz="2400" b="1" i="0" smtClean="0">
                                   <a:latin typeface="Cambria Math" panose="02040503050406030204" pitchFamily="18" charset="0"/>
                                 </a:rPr>
                               </m:ctrlPr>
@@ -26955,7 +25524,7 @@
                     <m:sSub>
                       <m:sSubPr>
                         <m:ctrlPr>
-                          <a:rPr lang="en-US" sz="2400" i="1">
+                          <a:rPr lang="en-US" sz="2400" b="1" i="0" smtClean="0">
                             <a:latin typeface="Cambria Math" panose="02040503050406030204" pitchFamily="18" charset="0"/>
                           </a:rPr>
                         </m:ctrlPr>
@@ -27028,7 +25597,7 @@
                     <m:sSub>
                       <m:sSubPr>
                         <m:ctrlPr>
-                          <a:rPr lang="en-US" sz="2400" i="1">
+                          <a:rPr lang="en-US" sz="2400" b="1">
                             <a:latin typeface="Cambria Math" panose="02040503050406030204" pitchFamily="18" charset="0"/>
                           </a:rPr>
                         </m:ctrlPr>
@@ -27089,7 +25658,7 @@
                     <m:sSub>
                       <m:sSubPr>
                         <m:ctrlPr>
-                          <a:rPr lang="en-US" sz="2400" i="1">
+                          <a:rPr lang="en-US" sz="2400" b="1" i="0" smtClean="0">
                             <a:latin typeface="Cambria Math" panose="02040503050406030204" pitchFamily="18" charset="0"/>
                           </a:rPr>
                         </m:ctrlPr>
@@ -27259,7 +25828,7 @@
                     <m:sSub>
                       <m:sSubPr>
                         <m:ctrlPr>
-                          <a:rPr lang="en-US" sz="2400" i="1">
+                          <a:rPr lang="en-US" sz="2400" b="1" i="0" smtClean="0">
                             <a:latin typeface="Cambria Math" panose="02040503050406030204" pitchFamily="18" charset="0"/>
                           </a:rPr>
                         </m:ctrlPr>
@@ -27332,7 +25901,7 @@
                     <m:sSub>
                       <m:sSubPr>
                         <m:ctrlPr>
-                          <a:rPr lang="en-US" sz="2400" i="1">
+                          <a:rPr lang="en-US" sz="2400" b="1" i="0" smtClean="0">
                             <a:latin typeface="Cambria Math" panose="02040503050406030204" pitchFamily="18" charset="0"/>
                           </a:rPr>
                         </m:ctrlPr>
@@ -27517,7 +26086,7 @@
                     <m:sSub>
                       <m:sSubPr>
                         <m:ctrlPr>
-                          <a:rPr lang="en-US" sz="2400" i="1">
+                          <a:rPr lang="en-US" sz="2400" b="1" i="0" smtClean="0">
                             <a:latin typeface="Cambria Math" panose="02040503050406030204" pitchFamily="18" charset="0"/>
                           </a:rPr>
                         </m:ctrlPr>
@@ -27691,7 +26260,7 @@
                     <m:sSub>
                       <m:sSubPr>
                         <m:ctrlPr>
-                          <a:rPr lang="en-US" sz="2400" i="1">
+                          <a:rPr lang="en-US" sz="2400" b="1" i="0" smtClean="0">
                             <a:latin typeface="Cambria Math" panose="02040503050406030204" pitchFamily="18" charset="0"/>
                           </a:rPr>
                         </m:ctrlPr>
@@ -27981,7 +26550,7 @@
           <a:p>
             <a:fld id="{F2775D9C-13D3-1C4D-BEA3-AC917AE1A73C}" type="datetime1">
               <a:rPr lang="en-US" smtClean="0"/>
-              <a:t>5/4/26</a:t>
+              <a:t>8/13/26</a:t>
             </a:fld>
             <a:endParaRPr lang="en-US"/>
           </a:p>
@@ -28581,6 +27150,12 @@
 </file>
 
 <file path=customXml/item1.xml><?xml version="1.0" encoding="utf-8"?>
+<p:properties xmlns:p="http://schemas.microsoft.com/office/2006/metadata/properties" xmlns:xsi="http://www.w3.org/2001/XMLSchema-instance" xmlns:pc="http://schemas.microsoft.com/office/infopath/2007/PartnerControls">
+  <documentManagement/>
+</p:properties>
+</file>
+
+<file path=customXml/item2.xml><?xml version="1.0" encoding="utf-8"?>
 <ct:contentTypeSchema xmlns:ct="http://schemas.microsoft.com/office/2006/metadata/contentType" xmlns:ma="http://schemas.microsoft.com/office/2006/metadata/properties/metaAttributes" ct:_="" ma:_="" ma:contentTypeName="Document" ma:contentTypeID="0x0101001AFBB6EF975807449194B44213CB1385" ma:contentTypeVersion="5" ma:contentTypeDescription="Create a new document." ma:contentTypeScope="" ma:versionID="6297688411df770d7ba805098bf03ebd">
   <xsd:schema xmlns:xsd="http://www.w3.org/2001/XMLSchema" xmlns:xs="http://www.w3.org/2001/XMLSchema" xmlns:p="http://schemas.microsoft.com/office/2006/metadata/properties" xmlns:ns3="d1af692f-475c-46b5-a87d-a47813ac8995" xmlns:ns4="ec38afac-11fd-4f05-b2a5-9d8ac7fc116b" targetNamespace="http://schemas.microsoft.com/office/2006/metadata/properties" ma:root="true" ma:fieldsID="a8acf1f0a3134d6bce4e4716f1f754da" ns3:_="" ns4:_="">
     <xsd:import namespace="d1af692f-475c-46b5-a87d-a47813ac8995"/>
@@ -28751,12 +27326,6 @@
 </ct:contentTypeSchema>
 </file>
 
-<file path=customXml/item2.xml><?xml version="1.0" encoding="utf-8"?>
-<p:properties xmlns:p="http://schemas.microsoft.com/office/2006/metadata/properties" xmlns:xsi="http://www.w3.org/2001/XMLSchema-instance" xmlns:pc="http://schemas.microsoft.com/office/infopath/2007/PartnerControls">
-  <documentManagement/>
-</p:properties>
-</file>
-
 <file path=customXml/item3.xml><?xml version="1.0" encoding="utf-8"?>
 <?mso-contentType ?>
 <FormTemplates xmlns="http://schemas.microsoft.com/sharepoint/v3/contenttype/forms">
@@ -28767,6 +27336,23 @@
 </file>
 
 <file path=customXml/itemProps1.xml><?xml version="1.0" encoding="utf-8"?>
+<ds:datastoreItem xmlns:ds="http://schemas.openxmlformats.org/officeDocument/2006/customXml" ds:itemID="{9A6F8A00-E1AD-4265-B062-9B9D9A2E6762}">
+  <ds:schemaRefs>
+    <ds:schemaRef ds:uri="http://www.w3.org/XML/1998/namespace"/>
+    <ds:schemaRef ds:uri="http://purl.org/dc/elements/1.1/"/>
+    <ds:schemaRef ds:uri="http://purl.org/dc/terms/"/>
+    <ds:schemaRef ds:uri="http://schemas.microsoft.com/office/infopath/2007/PartnerControls"/>
+    <ds:schemaRef ds:uri="http://schemas.microsoft.com/office/2006/documentManagement/types"/>
+    <ds:schemaRef ds:uri="http://purl.org/dc/dcmitype/"/>
+    <ds:schemaRef ds:uri="ec38afac-11fd-4f05-b2a5-9d8ac7fc116b"/>
+    <ds:schemaRef ds:uri="http://schemas.microsoft.com/office/2006/metadata/properties"/>
+    <ds:schemaRef ds:uri="http://schemas.openxmlformats.org/package/2006/metadata/core-properties"/>
+    <ds:schemaRef ds:uri="d1af692f-475c-46b5-a87d-a47813ac8995"/>
+  </ds:schemaRefs>
+</ds:datastoreItem>
+</file>
+
+<file path=customXml/itemProps2.xml><?xml version="1.0" encoding="utf-8"?>
 <ds:datastoreItem xmlns:ds="http://schemas.openxmlformats.org/officeDocument/2006/customXml" ds:itemID="{70C5DE3B-7C18-419B-966A-2505F93AAC34}">
   <ds:schemaRefs>
     <ds:schemaRef ds:uri="http://schemas.microsoft.com/office/2006/metadata/contentType"/>
@@ -28785,23 +27371,6 @@
 </ds:datastoreItem>
 </file>
 
-<file path=customXml/itemProps2.xml><?xml version="1.0" encoding="utf-8"?>
-<ds:datastoreItem xmlns:ds="http://schemas.openxmlformats.org/officeDocument/2006/customXml" ds:itemID="{9A6F8A00-E1AD-4265-B062-9B9D9A2E6762}">
-  <ds:schemaRefs>
-    <ds:schemaRef ds:uri="http://purl.org/dc/terms/"/>
-    <ds:schemaRef ds:uri="http://www.w3.org/XML/1998/namespace"/>
-    <ds:schemaRef ds:uri="http://schemas.microsoft.com/office/infopath/2007/PartnerControls"/>
-    <ds:schemaRef ds:uri="http://purl.org/dc/elements/1.1/"/>
-    <ds:schemaRef ds:uri="http://purl.org/dc/dcmitype/"/>
-    <ds:schemaRef ds:uri="http://schemas.microsoft.com/office/2006/documentManagement/types"/>
-    <ds:schemaRef ds:uri="http://schemas.microsoft.com/office/2006/metadata/properties"/>
-    <ds:schemaRef ds:uri="http://schemas.openxmlformats.org/package/2006/metadata/core-properties"/>
-    <ds:schemaRef ds:uri="ec38afac-11fd-4f05-b2a5-9d8ac7fc116b"/>
-    <ds:schemaRef ds:uri="d1af692f-475c-46b5-a87d-a47813ac8995"/>
-  </ds:schemaRefs>
-</ds:datastoreItem>
-</file>
-
 <file path=customXml/itemProps3.xml><?xml version="1.0" encoding="utf-8"?>
 <ds:datastoreItem xmlns:ds="http://schemas.openxmlformats.org/officeDocument/2006/customXml" ds:itemID="{DE5CB6F7-7F01-468A-89A7-0A9153641A0E}">
   <ds:schemaRefs>
